--- a/ppt/RAG11-Persistence-Agent.pptx
+++ b/ppt/RAG11-Persistence-Agent.pptx
@@ -5,10 +5,10 @@
     <p:sldMasterId id="2147483653" r:id="rId1"/>
   </p:sldMasterIdLst>
   <p:notesMasterIdLst>
-    <p:notesMasterId r:id="rId15"/>
+    <p:notesMasterId r:id="rId12"/>
   </p:notesMasterIdLst>
   <p:handoutMasterIdLst>
-    <p:handoutMasterId r:id="rId16"/>
+    <p:handoutMasterId r:id="rId13"/>
   </p:handoutMasterIdLst>
   <p:sldIdLst>
     <p:sldId id="264" r:id="rId2"/>
@@ -20,10 +20,7 @@
     <p:sldId id="282" r:id="rId8"/>
     <p:sldId id="293" r:id="rId9"/>
     <p:sldId id="284" r:id="rId10"/>
-    <p:sldId id="283" r:id="rId11"/>
-    <p:sldId id="285" r:id="rId12"/>
-    <p:sldId id="286" r:id="rId13"/>
-    <p:sldId id="288" r:id="rId14"/>
+    <p:sldId id="288" r:id="rId11"/>
   </p:sldIdLst>
   <p:sldSz cx="9144000" cy="6858000" type="screen4x3"/>
   <p:notesSz cx="6648450" cy="9782175"/>
@@ -3802,426 +3799,6 @@
           <p:cNvPr id="2" name="Titre 1">
             <a:extLst>
               <a:ext uri="{FF2B5EF4-FFF2-40B4-BE49-F238E27FC236}">
-                <a16:creationId xmlns:a16="http://schemas.microsoft.com/office/drawing/2014/main" id="{053AE19E-D7A7-0E83-F8DA-E918DFF2BDEA}"/>
-              </a:ext>
-            </a:extLst>
-          </p:cNvPr>
-          <p:cNvSpPr>
-            <a:spLocks noGrp="1"/>
-          </p:cNvSpPr>
-          <p:nvPr>
-            <p:ph type="title"/>
-          </p:nvPr>
-        </p:nvSpPr>
-        <p:spPr/>
-        <p:txBody>
-          <a:bodyPr/>
-          <a:lstStyle/>
-          <a:p>
-            <a:r>
-              <a:rPr lang="fr-FR" dirty="0"/>
-              <a:t>Agent</a:t>
-            </a:r>
-          </a:p>
-        </p:txBody>
-      </p:sp>
-      <p:sp>
-        <p:nvSpPr>
-          <p:cNvPr id="3" name="Espace réservé du contenu 2">
-            <a:extLst>
-              <a:ext uri="{FF2B5EF4-FFF2-40B4-BE49-F238E27FC236}">
-                <a16:creationId xmlns:a16="http://schemas.microsoft.com/office/drawing/2014/main" id="{D2E8FFFA-B049-8E1A-76C8-AFB0D2E44498}"/>
-              </a:ext>
-            </a:extLst>
-          </p:cNvPr>
-          <p:cNvSpPr>
-            <a:spLocks noGrp="1"/>
-          </p:cNvSpPr>
-          <p:nvPr>
-            <p:ph idx="1"/>
-          </p:nvPr>
-        </p:nvSpPr>
-        <p:spPr/>
-        <p:txBody>
-          <a:bodyPr/>
-          <a:lstStyle/>
-          <a:p>
-            <a:r>
-              <a:rPr lang="fr-FR" dirty="0"/>
-              <a:t>Supposons une requête LLM classique</a:t>
-            </a:r>
-          </a:p>
-          <a:p>
-            <a:endParaRPr lang="fr-FR" dirty="0"/>
-          </a:p>
-          <a:p>
-            <a:endParaRPr lang="fr-FR" dirty="0"/>
-          </a:p>
-          <a:p>
-            <a:endParaRPr lang="fr-FR" dirty="0"/>
-          </a:p>
-          <a:p>
-            <a:r>
-              <a:rPr lang="fr-FR" dirty="0"/>
-              <a:t>Un agent permet d'enrichir la requête LLM par la méthode de l'agent</a:t>
-            </a:r>
-          </a:p>
-        </p:txBody>
-      </p:sp>
-      <p:pic>
-        <p:nvPicPr>
-          <p:cNvPr id="5" name="Image 4">
-            <a:extLst>
-              <a:ext uri="{FF2B5EF4-FFF2-40B4-BE49-F238E27FC236}">
-                <a16:creationId xmlns:a16="http://schemas.microsoft.com/office/drawing/2014/main" id="{6500F459-FD1D-7884-E515-56D3F4BCA030}"/>
-              </a:ext>
-            </a:extLst>
-          </p:cNvPr>
-          <p:cNvPicPr>
-            <a:picLocks noChangeAspect="1"/>
-          </p:cNvPicPr>
-          <p:nvPr/>
-        </p:nvPicPr>
-        <p:blipFill>
-          <a:blip r:embed="rId2"/>
-          <a:stretch>
-            <a:fillRect/>
-          </a:stretch>
-        </p:blipFill>
-        <p:spPr>
-          <a:xfrm>
-            <a:off x="2411760" y="2060848"/>
-            <a:ext cx="4124901" cy="1152686"/>
-          </a:xfrm>
-          <a:prstGeom prst="rect">
-            <a:avLst/>
-          </a:prstGeom>
-        </p:spPr>
-      </p:pic>
-      <p:pic>
-        <p:nvPicPr>
-          <p:cNvPr id="7" name="Image 6">
-            <a:extLst>
-              <a:ext uri="{FF2B5EF4-FFF2-40B4-BE49-F238E27FC236}">
-                <a16:creationId xmlns:a16="http://schemas.microsoft.com/office/drawing/2014/main" id="{49856640-9286-AACA-76D7-A66B9006286F}"/>
-              </a:ext>
-            </a:extLst>
-          </p:cNvPr>
-          <p:cNvPicPr>
-            <a:picLocks noChangeAspect="1"/>
-          </p:cNvPicPr>
-          <p:nvPr/>
-        </p:nvPicPr>
-        <p:blipFill>
-          <a:blip r:embed="rId3"/>
-          <a:stretch>
-            <a:fillRect/>
-          </a:stretch>
-        </p:blipFill>
-        <p:spPr>
-          <a:xfrm>
-            <a:off x="1187624" y="4721223"/>
-            <a:ext cx="6725589" cy="1448002"/>
-          </a:xfrm>
-          <a:prstGeom prst="rect">
-            <a:avLst/>
-          </a:prstGeom>
-        </p:spPr>
-      </p:pic>
-    </p:spTree>
-    <p:extLst>
-      <p:ext uri="{BB962C8B-B14F-4D97-AF65-F5344CB8AC3E}">
-        <p14:creationId xmlns:p14="http://schemas.microsoft.com/office/powerpoint/2010/main" val="1009830935"/>
-      </p:ext>
-    </p:extLst>
-  </p:cSld>
-  <p:clrMapOvr>
-    <a:masterClrMapping/>
-  </p:clrMapOvr>
-</p:sld>
-</file>
-
-<file path=ppt/slides/slide11.xml><?xml version="1.0" encoding="utf-8"?>
-<p:sld xmlns:a="http://schemas.openxmlformats.org/drawingml/2006/main" xmlns:r="http://schemas.openxmlformats.org/officeDocument/2006/relationships" xmlns:p="http://schemas.openxmlformats.org/presentationml/2006/main">
-  <p:cSld>
-    <p:spTree>
-      <p:nvGrpSpPr>
-        <p:cNvPr id="1" name=""/>
-        <p:cNvGrpSpPr/>
-        <p:nvPr/>
-      </p:nvGrpSpPr>
-      <p:grpSpPr>
-        <a:xfrm>
-          <a:off x="0" y="0"/>
-          <a:ext cx="0" cy="0"/>
-          <a:chOff x="0" y="0"/>
-          <a:chExt cx="0" cy="0"/>
-        </a:xfrm>
-      </p:grpSpPr>
-      <p:sp>
-        <p:nvSpPr>
-          <p:cNvPr id="2" name="Titre 1">
-            <a:extLst>
-              <a:ext uri="{FF2B5EF4-FFF2-40B4-BE49-F238E27FC236}">
-                <a16:creationId xmlns:a16="http://schemas.microsoft.com/office/drawing/2014/main" id="{626F7EE6-7E1B-5825-8754-6C77409422F8}"/>
-              </a:ext>
-            </a:extLst>
-          </p:cNvPr>
-          <p:cNvSpPr>
-            <a:spLocks noGrp="1"/>
-          </p:cNvSpPr>
-          <p:nvPr>
-            <p:ph type="title"/>
-          </p:nvPr>
-        </p:nvSpPr>
-        <p:spPr/>
-        <p:txBody>
-          <a:bodyPr/>
-          <a:lstStyle/>
-          <a:p>
-            <a:r>
-              <a:rPr lang="fr-FR" dirty="0"/>
-              <a:t>Agent + RAG</a:t>
-            </a:r>
-          </a:p>
-        </p:txBody>
-      </p:sp>
-      <p:sp>
-        <p:nvSpPr>
-          <p:cNvPr id="3" name="Espace réservé du contenu 2">
-            <a:extLst>
-              <a:ext uri="{FF2B5EF4-FFF2-40B4-BE49-F238E27FC236}">
-                <a16:creationId xmlns:a16="http://schemas.microsoft.com/office/drawing/2014/main" id="{E3D2D3AE-96B6-89FA-63AA-1CCED998DB64}"/>
-              </a:ext>
-            </a:extLst>
-          </p:cNvPr>
-          <p:cNvSpPr>
-            <a:spLocks noGrp="1"/>
-          </p:cNvSpPr>
-          <p:nvPr>
-            <p:ph idx="1"/>
-          </p:nvPr>
-        </p:nvSpPr>
-        <p:spPr/>
-        <p:txBody>
-          <a:bodyPr/>
-          <a:lstStyle/>
-          <a:p>
-            <a:r>
-              <a:rPr lang="fr-FR" dirty="0"/>
-              <a:t>Un Agent est indépendant du RAG</a:t>
-            </a:r>
-          </a:p>
-          <a:p>
-            <a:pPr lvl="1"/>
-            <a:r>
-              <a:rPr lang="fr-FR" dirty="0"/>
-              <a:t>Peut compléter du RAG</a:t>
-            </a:r>
-          </a:p>
-          <a:p>
-            <a:pPr lvl="1"/>
-            <a:r>
-              <a:rPr lang="fr-FR" dirty="0"/>
-              <a:t>Il suffit de mettre le RAG dans une fonction</a:t>
-            </a:r>
-          </a:p>
-          <a:p>
-            <a:pPr lvl="1"/>
-            <a:endParaRPr lang="fr-FR" dirty="0"/>
-          </a:p>
-        </p:txBody>
-      </p:sp>
-      <p:pic>
-        <p:nvPicPr>
-          <p:cNvPr id="7" name="Image 6">
-            <a:extLst>
-              <a:ext uri="{FF2B5EF4-FFF2-40B4-BE49-F238E27FC236}">
-                <a16:creationId xmlns:a16="http://schemas.microsoft.com/office/drawing/2014/main" id="{2B423BD9-3EAB-8AFF-0220-56A980CD8FF7}"/>
-              </a:ext>
-            </a:extLst>
-          </p:cNvPr>
-          <p:cNvPicPr>
-            <a:picLocks noChangeAspect="1"/>
-          </p:cNvPicPr>
-          <p:nvPr/>
-        </p:nvPicPr>
-        <p:blipFill>
-          <a:blip r:embed="rId2"/>
-          <a:stretch>
-            <a:fillRect/>
-          </a:stretch>
-        </p:blipFill>
-        <p:spPr>
-          <a:xfrm>
-            <a:off x="1221446" y="2996952"/>
-            <a:ext cx="6839905" cy="3229426"/>
-          </a:xfrm>
-          <a:prstGeom prst="rect">
-            <a:avLst/>
-          </a:prstGeom>
-        </p:spPr>
-      </p:pic>
-    </p:spTree>
-    <p:extLst>
-      <p:ext uri="{BB962C8B-B14F-4D97-AF65-F5344CB8AC3E}">
-        <p14:creationId xmlns:p14="http://schemas.microsoft.com/office/powerpoint/2010/main" val="430089590"/>
-      </p:ext>
-    </p:extLst>
-  </p:cSld>
-  <p:clrMapOvr>
-    <a:masterClrMapping/>
-  </p:clrMapOvr>
-</p:sld>
-</file>
-
-<file path=ppt/slides/slide12.xml><?xml version="1.0" encoding="utf-8"?>
-<p:sld xmlns:a="http://schemas.openxmlformats.org/drawingml/2006/main" xmlns:r="http://schemas.openxmlformats.org/officeDocument/2006/relationships" xmlns:p="http://schemas.openxmlformats.org/presentationml/2006/main">
-  <p:cSld>
-    <p:spTree>
-      <p:nvGrpSpPr>
-        <p:cNvPr id="1" name=""/>
-        <p:cNvGrpSpPr/>
-        <p:nvPr/>
-      </p:nvGrpSpPr>
-      <p:grpSpPr>
-        <a:xfrm>
-          <a:off x="0" y="0"/>
-          <a:ext cx="0" cy="0"/>
-          <a:chOff x="0" y="0"/>
-          <a:chExt cx="0" cy="0"/>
-        </a:xfrm>
-      </p:grpSpPr>
-      <p:sp>
-        <p:nvSpPr>
-          <p:cNvPr id="2" name="Titre 1">
-            <a:extLst>
-              <a:ext uri="{FF2B5EF4-FFF2-40B4-BE49-F238E27FC236}">
-                <a16:creationId xmlns:a16="http://schemas.microsoft.com/office/drawing/2014/main" id="{02DCBE16-BFBA-9F6D-2476-F57EB0BD6CBB}"/>
-              </a:ext>
-            </a:extLst>
-          </p:cNvPr>
-          <p:cNvSpPr>
-            <a:spLocks noGrp="1"/>
-          </p:cNvSpPr>
-          <p:nvPr>
-            <p:ph type="title"/>
-          </p:nvPr>
-        </p:nvSpPr>
-        <p:spPr/>
-        <p:txBody>
-          <a:bodyPr/>
-          <a:lstStyle/>
-          <a:p>
-            <a:r>
-              <a:rPr lang="fr-FR" dirty="0"/>
-              <a:t>Agent + RAG</a:t>
-            </a:r>
-          </a:p>
-        </p:txBody>
-      </p:sp>
-      <p:sp>
-        <p:nvSpPr>
-          <p:cNvPr id="3" name="Espace réservé du contenu 2">
-            <a:extLst>
-              <a:ext uri="{FF2B5EF4-FFF2-40B4-BE49-F238E27FC236}">
-                <a16:creationId xmlns:a16="http://schemas.microsoft.com/office/drawing/2014/main" id="{BC00A1AF-10C0-974E-68B0-1E0BB27431E4}"/>
-              </a:ext>
-            </a:extLst>
-          </p:cNvPr>
-          <p:cNvSpPr>
-            <a:spLocks noGrp="1"/>
-          </p:cNvSpPr>
-          <p:nvPr>
-            <p:ph idx="1"/>
-          </p:nvPr>
-        </p:nvSpPr>
-        <p:spPr/>
-        <p:txBody>
-          <a:bodyPr/>
-          <a:lstStyle/>
-          <a:p>
-            <a:r>
-              <a:rPr lang="fr-FR"/>
-              <a:t>LA prompt </a:t>
-            </a:r>
-            <a:r>
-              <a:rPr lang="fr-FR" dirty="0"/>
-              <a:t>suivant va effectuer un RAG puis un appel à la fonction </a:t>
-            </a:r>
-            <a:r>
-              <a:rPr lang="fr-FR" dirty="0" err="1"/>
-              <a:t>multiply</a:t>
-            </a:r>
-            <a:endParaRPr lang="fr-FR" dirty="0"/>
-          </a:p>
-        </p:txBody>
-      </p:sp>
-      <p:pic>
-        <p:nvPicPr>
-          <p:cNvPr id="5" name="Image 4">
-            <a:extLst>
-              <a:ext uri="{FF2B5EF4-FFF2-40B4-BE49-F238E27FC236}">
-                <a16:creationId xmlns:a16="http://schemas.microsoft.com/office/drawing/2014/main" id="{86E79563-ECC2-8F67-34DA-2A52D023C82E}"/>
-              </a:ext>
-            </a:extLst>
-          </p:cNvPr>
-          <p:cNvPicPr>
-            <a:picLocks noChangeAspect="1"/>
-          </p:cNvPicPr>
-          <p:nvPr/>
-        </p:nvPicPr>
-        <p:blipFill>
-          <a:blip r:embed="rId2"/>
-          <a:stretch>
-            <a:fillRect/>
-          </a:stretch>
-        </p:blipFill>
-        <p:spPr>
-          <a:xfrm>
-            <a:off x="1904628" y="2785973"/>
-            <a:ext cx="5334744" cy="1286054"/>
-          </a:xfrm>
-          <a:prstGeom prst="rect">
-            <a:avLst/>
-          </a:prstGeom>
-        </p:spPr>
-      </p:pic>
-    </p:spTree>
-    <p:extLst>
-      <p:ext uri="{BB962C8B-B14F-4D97-AF65-F5344CB8AC3E}">
-        <p14:creationId xmlns:p14="http://schemas.microsoft.com/office/powerpoint/2010/main" val="2385522685"/>
-      </p:ext>
-    </p:extLst>
-  </p:cSld>
-  <p:clrMapOvr>
-    <a:masterClrMapping/>
-  </p:clrMapOvr>
-</p:sld>
-</file>
-
-<file path=ppt/slides/slide13.xml><?xml version="1.0" encoding="utf-8"?>
-<p:sld xmlns:a="http://schemas.openxmlformats.org/drawingml/2006/main" xmlns:r="http://schemas.openxmlformats.org/officeDocument/2006/relationships" xmlns:p="http://schemas.openxmlformats.org/presentationml/2006/main">
-  <p:cSld>
-    <p:spTree>
-      <p:nvGrpSpPr>
-        <p:cNvPr id="1" name=""/>
-        <p:cNvGrpSpPr/>
-        <p:nvPr/>
-      </p:nvGrpSpPr>
-      <p:grpSpPr>
-        <a:xfrm>
-          <a:off x="0" y="0"/>
-          <a:ext cx="0" cy="0"/>
-          <a:chOff x="0" y="0"/>
-          <a:chExt cx="0" cy="0"/>
-        </a:xfrm>
-      </p:grpSpPr>
-      <p:sp>
-        <p:nvSpPr>
-          <p:cNvPr id="2" name="Titre 1">
-            <a:extLst>
-              <a:ext uri="{FF2B5EF4-FFF2-40B4-BE49-F238E27FC236}">
                 <a16:creationId xmlns:a16="http://schemas.microsoft.com/office/drawing/2014/main" id="{2370A0E2-49A5-7C2E-92FD-CFE9D4C771E3}"/>
               </a:ext>
             </a:extLst>
@@ -4276,9 +3853,32 @@
           <a:lstStyle/>
           <a:p>
             <a:r>
+              <a:rPr lang="fr-FR" dirty="0"/>
+              <a:t>Il existe des agents préfabriqués</a:t>
+            </a:r>
+          </a:p>
+          <a:p>
+            <a:r>
+              <a:rPr lang="fr-FR" dirty="0" err="1"/>
+              <a:t>Tavily</a:t>
+            </a:r>
+            <a:r>
+              <a:rPr lang="fr-FR" dirty="0"/>
+              <a:t> </a:t>
+            </a:r>
+            <a:r>
+              <a:rPr lang="fr-FR" dirty="0" err="1"/>
+              <a:t>Search</a:t>
+            </a:r>
+            <a:r>
+              <a:rPr lang="fr-FR" dirty="0"/>
+              <a:t> est un agent de </a:t>
+            </a:r>
+            <a:r>
               <a:rPr lang="fr-FR"/>
-              <a:t>Recherche Web</a:t>
-            </a:r>
+              <a:t>recherche spécialisé pour les LLM</a:t>
+            </a:r>
+            <a:endParaRPr lang="fr-FR" dirty="0"/>
           </a:p>
         </p:txBody>
       </p:sp>
@@ -5529,6 +5129,36 @@
           <a:xfrm>
             <a:off x="7236296" y="1412776"/>
             <a:ext cx="1209844" cy="4582164"/>
+          </a:xfrm>
+          <a:prstGeom prst="rect">
+            <a:avLst/>
+          </a:prstGeom>
+        </p:spPr>
+      </p:pic>
+      <p:pic>
+        <p:nvPicPr>
+          <p:cNvPr id="7" name="Image 6">
+            <a:extLst>
+              <a:ext uri="{FF2B5EF4-FFF2-40B4-BE49-F238E27FC236}">
+                <a16:creationId xmlns:a16="http://schemas.microsoft.com/office/drawing/2014/main" id="{65AEA008-7EF0-1DF7-9F35-2E69CE3BFEEF}"/>
+              </a:ext>
+            </a:extLst>
+          </p:cNvPr>
+          <p:cNvPicPr>
+            <a:picLocks noChangeAspect="1"/>
+          </p:cNvPicPr>
+          <p:nvPr/>
+        </p:nvPicPr>
+        <p:blipFill>
+          <a:blip r:embed="rId3"/>
+          <a:stretch>
+            <a:fillRect/>
+          </a:stretch>
+        </p:blipFill>
+        <p:spPr>
+          <a:xfrm>
+            <a:off x="125289" y="4082273"/>
+            <a:ext cx="6174903" cy="1366264"/>
           </a:xfrm>
           <a:prstGeom prst="rect">
             <a:avLst/>

--- a/ppt/RAG11-Persistence-Agent.pptx
+++ b/ppt/RAG11-Persistence-Agent.pptx
@@ -5,22 +5,23 @@
     <p:sldMasterId id="2147483653" r:id="rId1"/>
   </p:sldMasterIdLst>
   <p:notesMasterIdLst>
-    <p:notesMasterId r:id="rId12"/>
+    <p:notesMasterId r:id="rId13"/>
   </p:notesMasterIdLst>
   <p:handoutMasterIdLst>
-    <p:handoutMasterId r:id="rId13"/>
+    <p:handoutMasterId r:id="rId14"/>
   </p:handoutMasterIdLst>
   <p:sldIdLst>
     <p:sldId id="264" r:id="rId2"/>
-    <p:sldId id="290" r:id="rId3"/>
-    <p:sldId id="291" r:id="rId4"/>
-    <p:sldId id="292" r:id="rId5"/>
-    <p:sldId id="276" r:id="rId6"/>
-    <p:sldId id="281" r:id="rId7"/>
-    <p:sldId id="282" r:id="rId8"/>
-    <p:sldId id="293" r:id="rId9"/>
-    <p:sldId id="284" r:id="rId10"/>
-    <p:sldId id="288" r:id="rId11"/>
+    <p:sldId id="294" r:id="rId3"/>
+    <p:sldId id="290" r:id="rId4"/>
+    <p:sldId id="291" r:id="rId5"/>
+    <p:sldId id="292" r:id="rId6"/>
+    <p:sldId id="276" r:id="rId7"/>
+    <p:sldId id="281" r:id="rId8"/>
+    <p:sldId id="282" r:id="rId9"/>
+    <p:sldId id="293" r:id="rId10"/>
+    <p:sldId id="284" r:id="rId11"/>
+    <p:sldId id="288" r:id="rId12"/>
   </p:sldIdLst>
   <p:sldSz cx="9144000" cy="6858000" type="screen4x3"/>
   <p:notesSz cx="6648450" cy="9782175"/>
@@ -3782,1235 +3783,6 @@
   <p:cSld>
     <p:spTree>
       <p:nvGrpSpPr>
-        <p:cNvPr id="1" name=""/>
-        <p:cNvGrpSpPr/>
-        <p:nvPr/>
-      </p:nvGrpSpPr>
-      <p:grpSpPr>
-        <a:xfrm>
-          <a:off x="0" y="0"/>
-          <a:ext cx="0" cy="0"/>
-          <a:chOff x="0" y="0"/>
-          <a:chExt cx="0" cy="0"/>
-        </a:xfrm>
-      </p:grpSpPr>
-      <p:sp>
-        <p:nvSpPr>
-          <p:cNvPr id="2" name="Titre 1">
-            <a:extLst>
-              <a:ext uri="{FF2B5EF4-FFF2-40B4-BE49-F238E27FC236}">
-                <a16:creationId xmlns:a16="http://schemas.microsoft.com/office/drawing/2014/main" id="{2370A0E2-49A5-7C2E-92FD-CFE9D4C771E3}"/>
-              </a:ext>
-            </a:extLst>
-          </p:cNvPr>
-          <p:cNvSpPr>
-            <a:spLocks noGrp="1"/>
-          </p:cNvSpPr>
-          <p:nvPr>
-            <p:ph type="title"/>
-          </p:nvPr>
-        </p:nvSpPr>
-        <p:spPr/>
-        <p:txBody>
-          <a:bodyPr/>
-          <a:lstStyle/>
-          <a:p>
-            <a:r>
-              <a:rPr lang="fr-FR" dirty="0" err="1"/>
-              <a:t>Tavily</a:t>
-            </a:r>
-            <a:r>
-              <a:rPr lang="fr-FR" dirty="0"/>
-              <a:t> </a:t>
-            </a:r>
-            <a:r>
-              <a:rPr lang="fr-FR" dirty="0" err="1"/>
-              <a:t>Search</a:t>
-            </a:r>
-            <a:endParaRPr lang="fr-FR" dirty="0"/>
-          </a:p>
-        </p:txBody>
-      </p:sp>
-      <p:sp>
-        <p:nvSpPr>
-          <p:cNvPr id="3" name="Espace réservé du contenu 2">
-            <a:extLst>
-              <a:ext uri="{FF2B5EF4-FFF2-40B4-BE49-F238E27FC236}">
-                <a16:creationId xmlns:a16="http://schemas.microsoft.com/office/drawing/2014/main" id="{6DA88AB3-9A4D-4C8D-AD49-1538D03C004F}"/>
-              </a:ext>
-            </a:extLst>
-          </p:cNvPr>
-          <p:cNvSpPr>
-            <a:spLocks noGrp="1"/>
-          </p:cNvSpPr>
-          <p:nvPr>
-            <p:ph idx="1"/>
-          </p:nvPr>
-        </p:nvSpPr>
-        <p:spPr/>
-        <p:txBody>
-          <a:bodyPr/>
-          <a:lstStyle/>
-          <a:p>
-            <a:r>
-              <a:rPr lang="fr-FR" dirty="0"/>
-              <a:t>Il existe des agents préfabriqués</a:t>
-            </a:r>
-          </a:p>
-          <a:p>
-            <a:r>
-              <a:rPr lang="fr-FR" dirty="0" err="1"/>
-              <a:t>Tavily</a:t>
-            </a:r>
-            <a:r>
-              <a:rPr lang="fr-FR" dirty="0"/>
-              <a:t> </a:t>
-            </a:r>
-            <a:r>
-              <a:rPr lang="fr-FR" dirty="0" err="1"/>
-              <a:t>Search</a:t>
-            </a:r>
-            <a:r>
-              <a:rPr lang="fr-FR" dirty="0"/>
-              <a:t> est un agent de </a:t>
-            </a:r>
-            <a:r>
-              <a:rPr lang="fr-FR"/>
-              <a:t>recherche spécialisé pour les LLM</a:t>
-            </a:r>
-            <a:endParaRPr lang="fr-FR" dirty="0"/>
-          </a:p>
-        </p:txBody>
-      </p:sp>
-    </p:spTree>
-    <p:extLst>
-      <p:ext uri="{BB962C8B-B14F-4D97-AF65-F5344CB8AC3E}">
-        <p14:creationId xmlns:p14="http://schemas.microsoft.com/office/powerpoint/2010/main" val="1423132459"/>
-      </p:ext>
-    </p:extLst>
-  </p:cSld>
-  <p:clrMapOvr>
-    <a:masterClrMapping/>
-  </p:clrMapOvr>
-</p:sld>
-</file>
-
-<file path=ppt/slides/slide2.xml><?xml version="1.0" encoding="utf-8"?>
-<p:sld xmlns:a="http://schemas.openxmlformats.org/drawingml/2006/main" xmlns:r="http://schemas.openxmlformats.org/officeDocument/2006/relationships" xmlns:p="http://schemas.openxmlformats.org/presentationml/2006/main">
-  <p:cSld>
-    <p:spTree>
-      <p:nvGrpSpPr>
-        <p:cNvPr id="1" name=""/>
-        <p:cNvGrpSpPr/>
-        <p:nvPr/>
-      </p:nvGrpSpPr>
-      <p:grpSpPr>
-        <a:xfrm>
-          <a:off x="0" y="0"/>
-          <a:ext cx="0" cy="0"/>
-          <a:chOff x="0" y="0"/>
-          <a:chExt cx="0" cy="0"/>
-        </a:xfrm>
-      </p:grpSpPr>
-      <p:sp>
-        <p:nvSpPr>
-          <p:cNvPr id="2" name="Titre 1">
-            <a:extLst>
-              <a:ext uri="{FF2B5EF4-FFF2-40B4-BE49-F238E27FC236}">
-                <a16:creationId xmlns:a16="http://schemas.microsoft.com/office/drawing/2014/main" id="{851B6D45-439D-ACFB-326E-14DE72EC9813}"/>
-              </a:ext>
-            </a:extLst>
-          </p:cNvPr>
-          <p:cNvSpPr>
-            <a:spLocks noGrp="1"/>
-          </p:cNvSpPr>
-          <p:nvPr>
-            <p:ph type="title"/>
-          </p:nvPr>
-        </p:nvSpPr>
-        <p:spPr/>
-        <p:txBody>
-          <a:bodyPr/>
-          <a:lstStyle/>
-          <a:p>
-            <a:r>
-              <a:rPr lang="fr-FR" dirty="0" err="1"/>
-              <a:t>Persistence</a:t>
-            </a:r>
-            <a:endParaRPr lang="fr-FR" dirty="0"/>
-          </a:p>
-        </p:txBody>
-      </p:sp>
-      <p:sp>
-        <p:nvSpPr>
-          <p:cNvPr id="3" name="Espace réservé du contenu 2">
-            <a:extLst>
-              <a:ext uri="{FF2B5EF4-FFF2-40B4-BE49-F238E27FC236}">
-                <a16:creationId xmlns:a16="http://schemas.microsoft.com/office/drawing/2014/main" id="{E762579D-C7B6-214E-27D5-B243A87C79AB}"/>
-              </a:ext>
-            </a:extLst>
-          </p:cNvPr>
-          <p:cNvSpPr>
-            <a:spLocks noGrp="1"/>
-          </p:cNvSpPr>
-          <p:nvPr>
-            <p:ph idx="1"/>
-          </p:nvPr>
-        </p:nvSpPr>
-        <p:spPr>
-          <a:xfrm>
-            <a:off x="179513" y="1412776"/>
-            <a:ext cx="4824536" cy="5040560"/>
-          </a:xfrm>
-        </p:spPr>
-        <p:txBody>
-          <a:bodyPr/>
-          <a:lstStyle/>
-          <a:p>
-            <a:r>
-              <a:rPr lang="fr-FR" dirty="0"/>
-              <a:t>Il est souvent utile de sauvegarder les conversations d'un RAG dans une BD</a:t>
-            </a:r>
-          </a:p>
-          <a:p>
-            <a:r>
-              <a:rPr lang="fr-FR" dirty="0"/>
-              <a:t>A long terme</a:t>
-            </a:r>
-          </a:p>
-          <a:p>
-            <a:pPr lvl="1"/>
-            <a:r>
-              <a:rPr lang="fr-FR" dirty="0"/>
-              <a:t>Un BD</a:t>
-            </a:r>
-          </a:p>
-          <a:p>
-            <a:r>
-              <a:rPr lang="fr-FR" dirty="0"/>
-              <a:t>A court terme</a:t>
-            </a:r>
-          </a:p>
-          <a:p>
-            <a:pPr lvl="1"/>
-            <a:r>
-              <a:rPr lang="fr-FR" dirty="0"/>
-              <a:t>Pour maintenir un contexte pendant le chat</a:t>
-            </a:r>
-          </a:p>
-        </p:txBody>
-      </p:sp>
-      <p:pic>
-        <p:nvPicPr>
-          <p:cNvPr id="1026" name="Picture 2">
-            <a:extLst>
-              <a:ext uri="{FF2B5EF4-FFF2-40B4-BE49-F238E27FC236}">
-                <a16:creationId xmlns:a16="http://schemas.microsoft.com/office/drawing/2014/main" id="{C17A0699-E38C-5647-9BDA-29A06CCB7ACB}"/>
-              </a:ext>
-            </a:extLst>
-          </p:cNvPr>
-          <p:cNvPicPr>
-            <a:picLocks noChangeAspect="1" noChangeArrowheads="1"/>
-          </p:cNvPicPr>
-          <p:nvPr/>
-        </p:nvPicPr>
-        <p:blipFill>
-          <a:blip r:embed="rId2">
-            <a:extLst>
-              <a:ext uri="{28A0092B-C50C-407E-A947-70E740481C1C}">
-                <a14:useLocalDpi xmlns:a14="http://schemas.microsoft.com/office/drawing/2010/main" val="0"/>
-              </a:ext>
-            </a:extLst>
-          </a:blip>
-          <a:srcRect/>
-          <a:stretch>
-            <a:fillRect/>
-          </a:stretch>
-        </p:blipFill>
-        <p:spPr bwMode="auto">
-          <a:xfrm>
-            <a:off x="4597825" y="2002532"/>
-            <a:ext cx="4510648" cy="2938636"/>
-          </a:xfrm>
-          <a:prstGeom prst="rect">
-            <a:avLst/>
-          </a:prstGeom>
-          <a:noFill/>
-          <a:extLst>
-            <a:ext uri="{909E8E84-426E-40DD-AFC4-6F175D3DCCD1}">
-              <a14:hiddenFill xmlns:a14="http://schemas.microsoft.com/office/drawing/2010/main">
-                <a:solidFill>
-                  <a:srgbClr val="FFFFFF"/>
-                </a:solidFill>
-              </a14:hiddenFill>
-            </a:ext>
-          </a:extLst>
-        </p:spPr>
-      </p:pic>
-    </p:spTree>
-    <p:extLst>
-      <p:ext uri="{BB962C8B-B14F-4D97-AF65-F5344CB8AC3E}">
-        <p14:creationId xmlns:p14="http://schemas.microsoft.com/office/powerpoint/2010/main" val="1701389020"/>
-      </p:ext>
-    </p:extLst>
-  </p:cSld>
-  <p:clrMapOvr>
-    <a:masterClrMapping/>
-  </p:clrMapOvr>
-</p:sld>
-</file>
-
-<file path=ppt/slides/slide3.xml><?xml version="1.0" encoding="utf-8"?>
-<p:sld xmlns:a="http://schemas.openxmlformats.org/drawingml/2006/main" xmlns:r="http://schemas.openxmlformats.org/officeDocument/2006/relationships" xmlns:p="http://schemas.openxmlformats.org/presentationml/2006/main">
-  <p:cSld>
-    <p:spTree>
-      <p:nvGrpSpPr>
-        <p:cNvPr id="1" name=""/>
-        <p:cNvGrpSpPr/>
-        <p:nvPr/>
-      </p:nvGrpSpPr>
-      <p:grpSpPr>
-        <a:xfrm>
-          <a:off x="0" y="0"/>
-          <a:ext cx="0" cy="0"/>
-          <a:chOff x="0" y="0"/>
-          <a:chExt cx="0" cy="0"/>
-        </a:xfrm>
-      </p:grpSpPr>
-      <p:sp>
-        <p:nvSpPr>
-          <p:cNvPr id="2" name="Titre 1">
-            <a:extLst>
-              <a:ext uri="{FF2B5EF4-FFF2-40B4-BE49-F238E27FC236}">
-                <a16:creationId xmlns:a16="http://schemas.microsoft.com/office/drawing/2014/main" id="{6EE4F2B0-FDBF-8452-85AC-25A45A39843F}"/>
-              </a:ext>
-            </a:extLst>
-          </p:cNvPr>
-          <p:cNvSpPr>
-            <a:spLocks noGrp="1"/>
-          </p:cNvSpPr>
-          <p:nvPr>
-            <p:ph type="title"/>
-          </p:nvPr>
-        </p:nvSpPr>
-        <p:spPr/>
-        <p:txBody>
-          <a:bodyPr/>
-          <a:lstStyle/>
-          <a:p>
-            <a:r>
-              <a:rPr lang="fr-FR" dirty="0" err="1"/>
-              <a:t>MemorySaver</a:t>
-            </a:r>
-            <a:endParaRPr lang="fr-FR" dirty="0"/>
-          </a:p>
-        </p:txBody>
-      </p:sp>
-      <p:sp>
-        <p:nvSpPr>
-          <p:cNvPr id="3" name="Espace réservé du contenu 2">
-            <a:extLst>
-              <a:ext uri="{FF2B5EF4-FFF2-40B4-BE49-F238E27FC236}">
-                <a16:creationId xmlns:a16="http://schemas.microsoft.com/office/drawing/2014/main" id="{CAD58AB0-14D5-7321-CFEF-DFA8EEED8B12}"/>
-              </a:ext>
-            </a:extLst>
-          </p:cNvPr>
-          <p:cNvSpPr>
-            <a:spLocks noGrp="1"/>
-          </p:cNvSpPr>
-          <p:nvPr>
-            <p:ph idx="1"/>
-          </p:nvPr>
-        </p:nvSpPr>
-        <p:spPr/>
-        <p:txBody>
-          <a:bodyPr/>
-          <a:lstStyle/>
-          <a:p>
-            <a:r>
-              <a:rPr lang="fr-FR" dirty="0"/>
-              <a:t>Mémoire à court terme</a:t>
-            </a:r>
-          </a:p>
-          <a:p>
-            <a:pPr lvl="1"/>
-            <a:r>
-              <a:rPr lang="en-US" dirty="0"/>
-              <a:t>from </a:t>
-            </a:r>
-            <a:r>
-              <a:rPr lang="en-US" dirty="0" err="1"/>
-              <a:t>langgraph.checkpoint.memory</a:t>
-            </a:r>
-            <a:r>
-              <a:rPr lang="en-US" dirty="0"/>
-              <a:t> import </a:t>
-            </a:r>
-            <a:r>
-              <a:rPr lang="en-US" dirty="0" err="1"/>
-              <a:t>MemorySaver</a:t>
-            </a:r>
-            <a:endParaRPr lang="en-US" dirty="0"/>
-          </a:p>
-          <a:p>
-            <a:pPr lvl="1"/>
-            <a:r>
-              <a:rPr lang="en-US" dirty="0"/>
-              <a:t>memory = </a:t>
-            </a:r>
-            <a:r>
-              <a:rPr lang="en-US" dirty="0" err="1"/>
-              <a:t>MemorySaver</a:t>
-            </a:r>
-            <a:r>
-              <a:rPr lang="en-US" dirty="0"/>
-              <a:t>()</a:t>
-            </a:r>
-          </a:p>
-          <a:p>
-            <a:pPr lvl="1"/>
-            <a:r>
-              <a:rPr lang="en-US" dirty="0"/>
-              <a:t>graph = </a:t>
-            </a:r>
-            <a:r>
-              <a:rPr lang="en-US" dirty="0" err="1"/>
-              <a:t>graph_builder.compile</a:t>
-            </a:r>
-            <a:r>
-              <a:rPr lang="en-US" dirty="0"/>
-              <a:t>(</a:t>
-            </a:r>
-            <a:r>
-              <a:rPr lang="en-US" dirty="0" err="1"/>
-              <a:t>checkpointer</a:t>
-            </a:r>
-            <a:r>
-              <a:rPr lang="en-US" dirty="0"/>
-              <a:t>=memory)</a:t>
-            </a:r>
-          </a:p>
-          <a:p>
-            <a:pPr lvl="1"/>
-            <a:r>
-              <a:rPr lang="en-US" dirty="0" err="1"/>
-              <a:t>Nécessite</a:t>
-            </a:r>
-            <a:r>
-              <a:rPr lang="en-US" dirty="0"/>
-              <a:t> un id unique par discussion</a:t>
-            </a:r>
-          </a:p>
-          <a:p>
-            <a:pPr lvl="1"/>
-            <a:r>
-              <a:rPr lang="en-US" dirty="0"/>
-              <a:t>config = {"configurable": {"</a:t>
-            </a:r>
-            <a:r>
-              <a:rPr lang="en-US" dirty="0" err="1"/>
-              <a:t>thread_id</a:t>
-            </a:r>
-            <a:r>
-              <a:rPr lang="en-US" dirty="0"/>
-              <a:t>": "uniqueId1234"}}</a:t>
-            </a:r>
-          </a:p>
-          <a:p>
-            <a:pPr lvl="1"/>
-            <a:r>
-              <a:rPr lang="en-US" dirty="0"/>
-              <a:t>response = </a:t>
-            </a:r>
-            <a:r>
-              <a:rPr lang="en-US" dirty="0" err="1"/>
-              <a:t>graph.invoke</a:t>
-            </a:r>
-            <a:r>
-              <a:rPr lang="en-US" dirty="0"/>
-              <a:t>({"question": "</a:t>
-            </a:r>
-            <a:r>
-              <a:rPr lang="en-US" dirty="0" err="1"/>
-              <a:t>Qu'est</a:t>
-            </a:r>
-            <a:r>
-              <a:rPr lang="en-US" dirty="0"/>
-              <a:t> </a:t>
-            </a:r>
-            <a:r>
-              <a:rPr lang="en-US" dirty="0" err="1"/>
-              <a:t>ce</a:t>
-            </a:r>
-            <a:r>
-              <a:rPr lang="en-US" dirty="0"/>
-              <a:t> </a:t>
-            </a:r>
-            <a:r>
-              <a:rPr lang="en-US" dirty="0" err="1"/>
-              <a:t>que</a:t>
-            </a:r>
-            <a:r>
-              <a:rPr lang="en-US" dirty="0"/>
-              <a:t> le RAG?"}, config=config)</a:t>
-            </a:r>
-          </a:p>
-          <a:p>
-            <a:pPr lvl="1"/>
-            <a:endParaRPr lang="fr-FR" dirty="0"/>
-          </a:p>
-        </p:txBody>
-      </p:sp>
-    </p:spTree>
-    <p:extLst>
-      <p:ext uri="{BB962C8B-B14F-4D97-AF65-F5344CB8AC3E}">
-        <p14:creationId xmlns:p14="http://schemas.microsoft.com/office/powerpoint/2010/main" val="1216784413"/>
-      </p:ext>
-    </p:extLst>
-  </p:cSld>
-  <p:clrMapOvr>
-    <a:masterClrMapping/>
-  </p:clrMapOvr>
-</p:sld>
-</file>
-
-<file path=ppt/slides/slide4.xml><?xml version="1.0" encoding="utf-8"?>
-<p:sld xmlns:a="http://schemas.openxmlformats.org/drawingml/2006/main" xmlns:r="http://schemas.openxmlformats.org/officeDocument/2006/relationships" xmlns:p="http://schemas.openxmlformats.org/presentationml/2006/main">
-  <p:cSld>
-    <p:spTree>
-      <p:nvGrpSpPr>
-        <p:cNvPr id="1" name=""/>
-        <p:cNvGrpSpPr/>
-        <p:nvPr/>
-      </p:nvGrpSpPr>
-      <p:grpSpPr>
-        <a:xfrm>
-          <a:off x="0" y="0"/>
-          <a:ext cx="0" cy="0"/>
-          <a:chOff x="0" y="0"/>
-          <a:chExt cx="0" cy="0"/>
-        </a:xfrm>
-      </p:grpSpPr>
-      <p:sp>
-        <p:nvSpPr>
-          <p:cNvPr id="2" name="Titre 1">
-            <a:extLst>
-              <a:ext uri="{FF2B5EF4-FFF2-40B4-BE49-F238E27FC236}">
-                <a16:creationId xmlns:a16="http://schemas.microsoft.com/office/drawing/2014/main" id="{819C70DA-55A3-E67C-1539-AB8DE106FA8C}"/>
-              </a:ext>
-            </a:extLst>
-          </p:cNvPr>
-          <p:cNvSpPr>
-            <a:spLocks noGrp="1"/>
-          </p:cNvSpPr>
-          <p:nvPr>
-            <p:ph type="title"/>
-          </p:nvPr>
-        </p:nvSpPr>
-        <p:spPr/>
-        <p:txBody>
-          <a:bodyPr/>
-          <a:lstStyle/>
-          <a:p>
-            <a:r>
-              <a:rPr lang="fr-FR" dirty="0" err="1"/>
-              <a:t>Postgres</a:t>
-            </a:r>
-            <a:endParaRPr lang="fr-FR" dirty="0"/>
-          </a:p>
-        </p:txBody>
-      </p:sp>
-      <p:sp>
-        <p:nvSpPr>
-          <p:cNvPr id="3" name="Espace réservé du contenu 2">
-            <a:extLst>
-              <a:ext uri="{FF2B5EF4-FFF2-40B4-BE49-F238E27FC236}">
-                <a16:creationId xmlns:a16="http://schemas.microsoft.com/office/drawing/2014/main" id="{61229378-B95C-3133-E9B3-A74DA9EEC97B}"/>
-              </a:ext>
-            </a:extLst>
-          </p:cNvPr>
-          <p:cNvSpPr>
-            <a:spLocks noGrp="1"/>
-          </p:cNvSpPr>
-          <p:nvPr>
-            <p:ph idx="1"/>
-          </p:nvPr>
-        </p:nvSpPr>
-        <p:spPr/>
-        <p:txBody>
-          <a:bodyPr/>
-          <a:lstStyle/>
-          <a:p>
-            <a:r>
-              <a:rPr lang="fr-FR" dirty="0"/>
-              <a:t>Enregistrement BD à long terme</a:t>
-            </a:r>
-          </a:p>
-          <a:p>
-            <a:pPr lvl="1"/>
-            <a:r>
-              <a:rPr lang="fr-FR" dirty="0" err="1"/>
-              <a:t>pip</a:t>
-            </a:r>
-            <a:r>
-              <a:rPr lang="fr-FR" dirty="0"/>
-              <a:t> </a:t>
-            </a:r>
-            <a:r>
-              <a:rPr lang="fr-FR" dirty="0" err="1"/>
-              <a:t>install</a:t>
-            </a:r>
-            <a:r>
-              <a:rPr lang="fr-FR" dirty="0"/>
-              <a:t> </a:t>
-            </a:r>
-            <a:r>
-              <a:rPr lang="fr-FR" dirty="0" err="1"/>
-              <a:t>langgraph</a:t>
-            </a:r>
-            <a:r>
-              <a:rPr lang="fr-FR" dirty="0"/>
-              <a:t>-checkpoint-</a:t>
-            </a:r>
-            <a:r>
-              <a:rPr lang="fr-FR" dirty="0" err="1"/>
-              <a:t>postgres</a:t>
-            </a:r>
-            <a:endParaRPr lang="fr-FR" dirty="0"/>
-          </a:p>
-          <a:p>
-            <a:pPr lvl="1"/>
-            <a:r>
-              <a:rPr lang="fr-FR" dirty="0" err="1"/>
-              <a:t>from</a:t>
-            </a:r>
-            <a:r>
-              <a:rPr lang="fr-FR" dirty="0"/>
-              <a:t> </a:t>
-            </a:r>
-            <a:r>
-              <a:rPr lang="fr-FR" dirty="0" err="1"/>
-              <a:t>langgraph.store.postgres</a:t>
-            </a:r>
-            <a:r>
-              <a:rPr lang="fr-FR" dirty="0"/>
-              <a:t> import </a:t>
-            </a:r>
-            <a:r>
-              <a:rPr lang="fr-FR" dirty="0" err="1"/>
-              <a:t>PostgresStore</a:t>
-            </a:r>
-            <a:endParaRPr lang="fr-FR" dirty="0"/>
-          </a:p>
-          <a:p>
-            <a:pPr lvl="1"/>
-            <a:r>
-              <a:rPr lang="fr-FR" dirty="0" err="1"/>
-              <a:t>with</a:t>
-            </a:r>
-            <a:r>
-              <a:rPr lang="fr-FR" dirty="0"/>
-              <a:t> </a:t>
-            </a:r>
-            <a:r>
-              <a:rPr lang="fr-FR" dirty="0" err="1"/>
-              <a:t>PostgresStore.from_conn_string</a:t>
-            </a:r>
-            <a:r>
-              <a:rPr lang="fr-FR" dirty="0"/>
-              <a:t>(DB_URI) as store:</a:t>
-            </a:r>
-          </a:p>
-          <a:p>
-            <a:pPr lvl="1"/>
-            <a:r>
-              <a:rPr lang="fr-FR" dirty="0"/>
-              <a:t>    </a:t>
-            </a:r>
-            <a:r>
-              <a:rPr lang="fr-FR" dirty="0" err="1"/>
-              <a:t>builder</a:t>
-            </a:r>
-            <a:r>
-              <a:rPr lang="fr-FR" dirty="0"/>
-              <a:t> = </a:t>
-            </a:r>
-            <a:r>
-              <a:rPr lang="fr-FR" dirty="0" err="1"/>
-              <a:t>StateGraph</a:t>
-            </a:r>
-            <a:r>
-              <a:rPr lang="fr-FR" dirty="0"/>
-              <a:t>(...)</a:t>
-            </a:r>
-          </a:p>
-          <a:p>
-            <a:pPr lvl="1"/>
-            <a:r>
-              <a:rPr lang="fr-FR" dirty="0"/>
-              <a:t>    graph = </a:t>
-            </a:r>
-            <a:r>
-              <a:rPr lang="fr-FR" dirty="0" err="1"/>
-              <a:t>builder.compile</a:t>
-            </a:r>
-            <a:r>
-              <a:rPr lang="fr-FR" dirty="0"/>
-              <a:t>(store=store)</a:t>
-            </a:r>
-          </a:p>
-          <a:p>
-            <a:endParaRPr lang="fr-FR" dirty="0"/>
-          </a:p>
-        </p:txBody>
-      </p:sp>
-    </p:spTree>
-    <p:extLst>
-      <p:ext uri="{BB962C8B-B14F-4D97-AF65-F5344CB8AC3E}">
-        <p14:creationId xmlns:p14="http://schemas.microsoft.com/office/powerpoint/2010/main" val="3558070663"/>
-      </p:ext>
-    </p:extLst>
-  </p:cSld>
-  <p:clrMapOvr>
-    <a:masterClrMapping/>
-  </p:clrMapOvr>
-</p:sld>
-</file>
-
-<file path=ppt/slides/slide5.xml><?xml version="1.0" encoding="utf-8"?>
-<p:sld xmlns:a="http://schemas.openxmlformats.org/drawingml/2006/main" xmlns:r="http://schemas.openxmlformats.org/officeDocument/2006/relationships" xmlns:p="http://schemas.openxmlformats.org/presentationml/2006/main">
-  <p:cSld>
-    <p:spTree>
-      <p:nvGrpSpPr>
-        <p:cNvPr id="1" name=""/>
-        <p:cNvGrpSpPr/>
-        <p:nvPr/>
-      </p:nvGrpSpPr>
-      <p:grpSpPr>
-        <a:xfrm>
-          <a:off x="0" y="0"/>
-          <a:ext cx="0" cy="0"/>
-          <a:chOff x="0" y="0"/>
-          <a:chExt cx="0" cy="0"/>
-        </a:xfrm>
-      </p:grpSpPr>
-      <p:sp>
-        <p:nvSpPr>
-          <p:cNvPr id="2" name="Titre 1">
-            <a:extLst>
-              <a:ext uri="{FF2B5EF4-FFF2-40B4-BE49-F238E27FC236}">
-                <a16:creationId xmlns:a16="http://schemas.microsoft.com/office/drawing/2014/main" id="{8093EA56-7AFF-2D78-ED74-A79E2C10832F}"/>
-              </a:ext>
-            </a:extLst>
-          </p:cNvPr>
-          <p:cNvSpPr>
-            <a:spLocks noGrp="1"/>
-          </p:cNvSpPr>
-          <p:nvPr>
-            <p:ph type="title"/>
-          </p:nvPr>
-        </p:nvSpPr>
-        <p:spPr/>
-        <p:txBody>
-          <a:bodyPr/>
-          <a:lstStyle/>
-          <a:p>
-            <a:r>
-              <a:rPr lang="fr-FR" dirty="0"/>
-              <a:t>Agent IA</a:t>
-            </a:r>
-          </a:p>
-        </p:txBody>
-      </p:sp>
-      <p:sp>
-        <p:nvSpPr>
-          <p:cNvPr id="3" name="Espace réservé du contenu 2">
-            <a:extLst>
-              <a:ext uri="{FF2B5EF4-FFF2-40B4-BE49-F238E27FC236}">
-                <a16:creationId xmlns:a16="http://schemas.microsoft.com/office/drawing/2014/main" id="{511D3116-3EDB-E50F-2228-F97618BF24A8}"/>
-              </a:ext>
-            </a:extLst>
-          </p:cNvPr>
-          <p:cNvSpPr>
-            <a:spLocks noGrp="1"/>
-          </p:cNvSpPr>
-          <p:nvPr>
-            <p:ph idx="1"/>
-          </p:nvPr>
-        </p:nvSpPr>
-        <p:spPr/>
-        <p:txBody>
-          <a:bodyPr/>
-          <a:lstStyle/>
-          <a:p>
-            <a:r>
-              <a:rPr lang="fr-FR" dirty="0"/>
-              <a:t>En intelligence artificielle, un agent intelligent est une entité autonome, éventuellement dotée d'une persona, éventuellement capable de percevoir son environnement grâce à des capteurs, ainsi que d'agir sur celui-ci, au moyen d'effecteurs, afin de réaliser une tâche</a:t>
-            </a:r>
-          </a:p>
-        </p:txBody>
-      </p:sp>
-    </p:spTree>
-    <p:extLst>
-      <p:ext uri="{BB962C8B-B14F-4D97-AF65-F5344CB8AC3E}">
-        <p14:creationId xmlns:p14="http://schemas.microsoft.com/office/powerpoint/2010/main" val="3531968666"/>
-      </p:ext>
-    </p:extLst>
-  </p:cSld>
-  <p:clrMapOvr>
-    <a:masterClrMapping/>
-  </p:clrMapOvr>
-</p:sld>
-</file>
-
-<file path=ppt/slides/slide6.xml><?xml version="1.0" encoding="utf-8"?>
-<p:sld xmlns:a="http://schemas.openxmlformats.org/drawingml/2006/main" xmlns:r="http://schemas.openxmlformats.org/officeDocument/2006/relationships" xmlns:p="http://schemas.openxmlformats.org/presentationml/2006/main">
-  <p:cSld>
-    <p:spTree>
-      <p:nvGrpSpPr>
-        <p:cNvPr id="1" name=""/>
-        <p:cNvGrpSpPr/>
-        <p:nvPr/>
-      </p:nvGrpSpPr>
-      <p:grpSpPr>
-        <a:xfrm>
-          <a:off x="0" y="0"/>
-          <a:ext cx="0" cy="0"/>
-          <a:chOff x="0" y="0"/>
-          <a:chExt cx="0" cy="0"/>
-        </a:xfrm>
-      </p:grpSpPr>
-      <p:sp>
-        <p:nvSpPr>
-          <p:cNvPr id="2" name="Titre 1">
-            <a:extLst>
-              <a:ext uri="{FF2B5EF4-FFF2-40B4-BE49-F238E27FC236}">
-                <a16:creationId xmlns:a16="http://schemas.microsoft.com/office/drawing/2014/main" id="{91A130BB-9F17-3B45-8948-B193BC001C3D}"/>
-              </a:ext>
-            </a:extLst>
-          </p:cNvPr>
-          <p:cNvSpPr>
-            <a:spLocks noGrp="1"/>
-          </p:cNvSpPr>
-          <p:nvPr>
-            <p:ph type="title"/>
-          </p:nvPr>
-        </p:nvSpPr>
-        <p:spPr/>
-        <p:txBody>
-          <a:bodyPr/>
-          <a:lstStyle/>
-          <a:p>
-            <a:r>
-              <a:rPr lang="fr-FR" dirty="0"/>
-              <a:t>Agent</a:t>
-            </a:r>
-          </a:p>
-        </p:txBody>
-      </p:sp>
-      <p:sp>
-        <p:nvSpPr>
-          <p:cNvPr id="3" name="Espace réservé du contenu 2">
-            <a:extLst>
-              <a:ext uri="{FF2B5EF4-FFF2-40B4-BE49-F238E27FC236}">
-                <a16:creationId xmlns:a16="http://schemas.microsoft.com/office/drawing/2014/main" id="{9D1724F3-AE22-BFB5-97C6-34205098C540}"/>
-              </a:ext>
-            </a:extLst>
-          </p:cNvPr>
-          <p:cNvSpPr>
-            <a:spLocks noGrp="1"/>
-          </p:cNvSpPr>
-          <p:nvPr>
-            <p:ph idx="1"/>
-          </p:nvPr>
-        </p:nvSpPr>
-        <p:spPr/>
-        <p:txBody>
-          <a:bodyPr/>
-          <a:lstStyle/>
-          <a:p>
-            <a:r>
-              <a:rPr lang="fr-FR" dirty="0"/>
-              <a:t>Un agent doit donc être capable</a:t>
-            </a:r>
-          </a:p>
-          <a:p>
-            <a:pPr lvl="1"/>
-            <a:r>
-              <a:rPr lang="fr-FR" dirty="0"/>
-              <a:t>D'interagir avec une API externe</a:t>
-            </a:r>
-          </a:p>
-          <a:p>
-            <a:pPr lvl="1"/>
-            <a:r>
-              <a:rPr lang="fr-FR" dirty="0"/>
-              <a:t>API, SQL, Capteurs, …</a:t>
-            </a:r>
-          </a:p>
-          <a:p>
-            <a:pPr lvl="1"/>
-            <a:r>
-              <a:rPr lang="fr-FR" dirty="0"/>
-              <a:t>D'interagir avec le LLM</a:t>
-            </a:r>
-          </a:p>
-          <a:p>
-            <a:r>
-              <a:rPr lang="fr-FR" dirty="0"/>
-              <a:t>L'agent va enrichir la réponse du LLM</a:t>
-            </a:r>
-          </a:p>
-          <a:p>
-            <a:pPr lvl="1"/>
-            <a:r>
-              <a:rPr lang="fr-FR" dirty="0"/>
-              <a:t>Arrive en fin de RAG</a:t>
-            </a:r>
-          </a:p>
-          <a:p>
-            <a:r>
-              <a:rPr lang="fr-FR" dirty="0"/>
-              <a:t>Peut être autonome</a:t>
-            </a:r>
-          </a:p>
-          <a:p>
-            <a:pPr lvl="1"/>
-            <a:r>
-              <a:rPr lang="fr-FR" dirty="0"/>
-              <a:t>Programme indépendant</a:t>
-            </a:r>
-          </a:p>
-        </p:txBody>
-      </p:sp>
-    </p:spTree>
-    <p:extLst>
-      <p:ext uri="{BB962C8B-B14F-4D97-AF65-F5344CB8AC3E}">
-        <p14:creationId xmlns:p14="http://schemas.microsoft.com/office/powerpoint/2010/main" val="3429707302"/>
-      </p:ext>
-    </p:extLst>
-  </p:cSld>
-  <p:clrMapOvr>
-    <a:masterClrMapping/>
-  </p:clrMapOvr>
-</p:sld>
-</file>
-
-<file path=ppt/slides/slide7.xml><?xml version="1.0" encoding="utf-8"?>
-<p:sld xmlns:a="http://schemas.openxmlformats.org/drawingml/2006/main" xmlns:r="http://schemas.openxmlformats.org/officeDocument/2006/relationships" xmlns:p="http://schemas.openxmlformats.org/presentationml/2006/main">
-  <p:cSld>
-    <p:spTree>
-      <p:nvGrpSpPr>
-        <p:cNvPr id="1" name=""/>
-        <p:cNvGrpSpPr/>
-        <p:nvPr/>
-      </p:nvGrpSpPr>
-      <p:grpSpPr>
-        <a:xfrm>
-          <a:off x="0" y="0"/>
-          <a:ext cx="0" cy="0"/>
-          <a:chOff x="0" y="0"/>
-          <a:chExt cx="0" cy="0"/>
-        </a:xfrm>
-      </p:grpSpPr>
-      <p:sp>
-        <p:nvSpPr>
-          <p:cNvPr id="2" name="Titre 1">
-            <a:extLst>
-              <a:ext uri="{FF2B5EF4-FFF2-40B4-BE49-F238E27FC236}">
-                <a16:creationId xmlns:a16="http://schemas.microsoft.com/office/drawing/2014/main" id="{A381E18B-F2F8-FC0E-821B-0E065BBC51BE}"/>
-              </a:ext>
-            </a:extLst>
-          </p:cNvPr>
-          <p:cNvSpPr>
-            <a:spLocks noGrp="1"/>
-          </p:cNvSpPr>
-          <p:nvPr>
-            <p:ph type="title"/>
-          </p:nvPr>
-        </p:nvSpPr>
-        <p:spPr/>
-        <p:txBody>
-          <a:bodyPr/>
-          <a:lstStyle/>
-          <a:p>
-            <a:r>
-              <a:rPr lang="fr-FR" dirty="0"/>
-              <a:t>Exemple</a:t>
-            </a:r>
-          </a:p>
-        </p:txBody>
-      </p:sp>
-      <p:sp>
-        <p:nvSpPr>
-          <p:cNvPr id="3" name="Espace réservé du contenu 2">
-            <a:extLst>
-              <a:ext uri="{FF2B5EF4-FFF2-40B4-BE49-F238E27FC236}">
-                <a16:creationId xmlns:a16="http://schemas.microsoft.com/office/drawing/2014/main" id="{9B5834EA-A5F6-CE1B-773B-0E640B1F8F18}"/>
-              </a:ext>
-            </a:extLst>
-          </p:cNvPr>
-          <p:cNvSpPr>
-            <a:spLocks noGrp="1"/>
-          </p:cNvSpPr>
-          <p:nvPr>
-            <p:ph idx="1"/>
-          </p:nvPr>
-        </p:nvSpPr>
-        <p:spPr/>
-        <p:txBody>
-          <a:bodyPr/>
-          <a:lstStyle/>
-          <a:p>
-            <a:r>
-              <a:rPr lang="fr-FR" dirty="0"/>
-              <a:t>Supposons une fonction métier</a:t>
-            </a:r>
-          </a:p>
-          <a:p>
-            <a:pPr lvl="1"/>
-            <a:r>
-              <a:rPr lang="fr-FR" dirty="0"/>
-              <a:t>Capteur de température</a:t>
-            </a:r>
-          </a:p>
-          <a:p>
-            <a:pPr lvl="1"/>
-            <a:r>
-              <a:rPr lang="fr-FR" dirty="0"/>
-              <a:t>Calcul complexe</a:t>
-            </a:r>
-          </a:p>
-          <a:p>
-            <a:pPr lvl="1"/>
-            <a:r>
-              <a:rPr lang="fr-FR" dirty="0"/>
-              <a:t>Interrogation SQL</a:t>
-            </a:r>
-          </a:p>
-        </p:txBody>
-      </p:sp>
-      <p:pic>
-        <p:nvPicPr>
-          <p:cNvPr id="8" name="Image 7">
-            <a:extLst>
-              <a:ext uri="{FF2B5EF4-FFF2-40B4-BE49-F238E27FC236}">
-                <a16:creationId xmlns:a16="http://schemas.microsoft.com/office/drawing/2014/main" id="{57EDEC46-43DE-0177-0BA9-E919E8028F65}"/>
-              </a:ext>
-            </a:extLst>
-          </p:cNvPr>
-          <p:cNvPicPr>
-            <a:picLocks noChangeAspect="1"/>
-          </p:cNvPicPr>
-          <p:nvPr/>
-        </p:nvPicPr>
-        <p:blipFill>
-          <a:blip r:embed="rId2"/>
-          <a:stretch>
-            <a:fillRect/>
-          </a:stretch>
-        </p:blipFill>
-        <p:spPr>
-          <a:xfrm>
-            <a:off x="1445860" y="3789040"/>
-            <a:ext cx="4289750" cy="1260839"/>
-          </a:xfrm>
-          <a:prstGeom prst="rect">
-            <a:avLst/>
-          </a:prstGeom>
-        </p:spPr>
-      </p:pic>
-    </p:spTree>
-    <p:extLst>
-      <p:ext uri="{BB962C8B-B14F-4D97-AF65-F5344CB8AC3E}">
-        <p14:creationId xmlns:p14="http://schemas.microsoft.com/office/powerpoint/2010/main" val="249956595"/>
-      </p:ext>
-    </p:extLst>
-  </p:cSld>
-  <p:clrMapOvr>
-    <a:masterClrMapping/>
-  </p:clrMapOvr>
-</p:sld>
-</file>
-
-<file path=ppt/slides/slide8.xml><?xml version="1.0" encoding="utf-8"?>
-<p:sld xmlns:a="http://schemas.openxmlformats.org/drawingml/2006/main" xmlns:r="http://schemas.openxmlformats.org/officeDocument/2006/relationships" xmlns:p="http://schemas.openxmlformats.org/presentationml/2006/main">
-  <p:cSld>
-    <p:spTree>
-      <p:nvGrpSpPr>
-        <p:cNvPr id="1" name=""/>
-        <p:cNvGrpSpPr/>
-        <p:nvPr/>
-      </p:nvGrpSpPr>
-      <p:grpSpPr>
-        <a:xfrm>
-          <a:off x="0" y="0"/>
-          <a:ext cx="0" cy="0"/>
-          <a:chOff x="0" y="0"/>
-          <a:chExt cx="0" cy="0"/>
-        </a:xfrm>
-      </p:grpSpPr>
-      <p:sp>
-        <p:nvSpPr>
-          <p:cNvPr id="2" name="Titre 1">
-            <a:extLst>
-              <a:ext uri="{FF2B5EF4-FFF2-40B4-BE49-F238E27FC236}">
-                <a16:creationId xmlns:a16="http://schemas.microsoft.com/office/drawing/2014/main" id="{C088FA9A-6A73-4320-BBC9-9B6BCC2B4255}"/>
-              </a:ext>
-            </a:extLst>
-          </p:cNvPr>
-          <p:cNvSpPr>
-            <a:spLocks noGrp="1"/>
-          </p:cNvSpPr>
-          <p:nvPr>
-            <p:ph type="title"/>
-          </p:nvPr>
-        </p:nvSpPr>
-        <p:spPr/>
-        <p:txBody>
-          <a:bodyPr/>
-          <a:lstStyle/>
-          <a:p>
-            <a:r>
-              <a:rPr lang="fr-FR" dirty="0"/>
-              <a:t>Tool</a:t>
-            </a:r>
-          </a:p>
-        </p:txBody>
-      </p:sp>
-      <p:sp>
-        <p:nvSpPr>
-          <p:cNvPr id="3" name="Espace réservé du contenu 2">
-            <a:extLst>
-              <a:ext uri="{FF2B5EF4-FFF2-40B4-BE49-F238E27FC236}">
-                <a16:creationId xmlns:a16="http://schemas.microsoft.com/office/drawing/2014/main" id="{58CAC8F5-6B28-F127-48A6-0020A9C8AA62}"/>
-              </a:ext>
-            </a:extLst>
-          </p:cNvPr>
-          <p:cNvSpPr>
-            <a:spLocks noGrp="1"/>
-          </p:cNvSpPr>
-          <p:nvPr>
-            <p:ph idx="1"/>
-          </p:nvPr>
-        </p:nvSpPr>
-        <p:spPr/>
-        <p:txBody>
-          <a:bodyPr/>
-          <a:lstStyle/>
-          <a:p>
-            <a:r>
-              <a:rPr lang="fr-FR" dirty="0"/>
-              <a:t>Un Tool est un outil que l'on peut intégrer à l'appel du LLM</a:t>
-            </a:r>
-          </a:p>
-          <a:p>
-            <a:pPr lvl="1"/>
-            <a:r>
-              <a:rPr lang="fr-FR" dirty="0"/>
-              <a:t>Décoration Python</a:t>
-            </a:r>
-          </a:p>
-          <a:p>
-            <a:pPr lvl="1"/>
-            <a:r>
-              <a:rPr lang="fr-FR" dirty="0" err="1"/>
-              <a:t>PyDoc</a:t>
-            </a:r>
-            <a:r>
-              <a:rPr lang="fr-FR" dirty="0"/>
-              <a:t> obligatoire</a:t>
-            </a:r>
-          </a:p>
-          <a:p>
-            <a:pPr lvl="1"/>
-            <a:r>
-              <a:rPr lang="en-US" dirty="0"/>
-              <a:t>from </a:t>
-            </a:r>
-            <a:r>
-              <a:rPr lang="en-US" dirty="0" err="1"/>
-              <a:t>langchain_core.tools</a:t>
-            </a:r>
-            <a:r>
-              <a:rPr lang="en-US" dirty="0"/>
-              <a:t> import tool</a:t>
-            </a:r>
-          </a:p>
-          <a:p>
-            <a:pPr lvl="1"/>
-            <a:r>
-              <a:rPr lang="en-US" dirty="0" err="1"/>
-              <a:t>llm</a:t>
-            </a:r>
-            <a:r>
-              <a:rPr lang="en-US" dirty="0"/>
-              <a:t> = </a:t>
-            </a:r>
-            <a:r>
-              <a:rPr lang="en-US" dirty="0" err="1"/>
-              <a:t>llm.bind_tools</a:t>
-            </a:r>
-            <a:r>
-              <a:rPr lang="en-US" dirty="0"/>
-              <a:t>(tools)</a:t>
-            </a:r>
-            <a:endParaRPr lang="fr-FR" dirty="0"/>
-          </a:p>
-          <a:p>
-            <a:pPr lvl="1"/>
-            <a:endParaRPr lang="fr-FR" dirty="0"/>
-          </a:p>
-        </p:txBody>
-      </p:sp>
-      <p:pic>
-        <p:nvPicPr>
-          <p:cNvPr id="5" name="Image 4">
-            <a:extLst>
-              <a:ext uri="{FF2B5EF4-FFF2-40B4-BE49-F238E27FC236}">
-                <a16:creationId xmlns:a16="http://schemas.microsoft.com/office/drawing/2014/main" id="{F7A95A2D-4B1C-2B3B-183D-3D14D52081FA}"/>
-              </a:ext>
-            </a:extLst>
-          </p:cNvPr>
-          <p:cNvPicPr>
-            <a:picLocks noChangeAspect="1"/>
-          </p:cNvPicPr>
-          <p:nvPr/>
-        </p:nvPicPr>
-        <p:blipFill>
-          <a:blip r:embed="rId2"/>
-          <a:stretch>
-            <a:fillRect/>
-          </a:stretch>
-        </p:blipFill>
-        <p:spPr>
-          <a:xfrm>
-            <a:off x="4572000" y="3642787"/>
-            <a:ext cx="3689619" cy="2810549"/>
-          </a:xfrm>
-          <a:prstGeom prst="rect">
-            <a:avLst/>
-          </a:prstGeom>
-        </p:spPr>
-      </p:pic>
-    </p:spTree>
-    <p:extLst>
-      <p:ext uri="{BB962C8B-B14F-4D97-AF65-F5344CB8AC3E}">
-        <p14:creationId xmlns:p14="http://schemas.microsoft.com/office/powerpoint/2010/main" val="3091717993"/>
-      </p:ext>
-    </p:extLst>
-  </p:cSld>
-  <p:clrMapOvr>
-    <a:masterClrMapping/>
-  </p:clrMapOvr>
-</p:sld>
-</file>
-
-<file path=ppt/slides/slide9.xml><?xml version="1.0" encoding="utf-8"?>
-<p:sld xmlns:a="http://schemas.openxmlformats.org/drawingml/2006/main" xmlns:r="http://schemas.openxmlformats.org/officeDocument/2006/relationships" xmlns:p="http://schemas.openxmlformats.org/presentationml/2006/main">
-  <p:cSld>
-    <p:spTree>
-      <p:nvGrpSpPr>
         <p:cNvPr id="1" name="">
           <a:extLst>
             <a:ext uri="{FF2B5EF4-FFF2-40B4-BE49-F238E27FC236}">
@@ -5169,6 +3941,1348 @@
     <p:extLst>
       <p:ext uri="{BB962C8B-B14F-4D97-AF65-F5344CB8AC3E}">
         <p14:creationId xmlns:p14="http://schemas.microsoft.com/office/powerpoint/2010/main" val="2235967337"/>
+      </p:ext>
+    </p:extLst>
+  </p:cSld>
+  <p:clrMapOvr>
+    <a:masterClrMapping/>
+  </p:clrMapOvr>
+</p:sld>
+</file>
+
+<file path=ppt/slides/slide11.xml><?xml version="1.0" encoding="utf-8"?>
+<p:sld xmlns:a="http://schemas.openxmlformats.org/drawingml/2006/main" xmlns:r="http://schemas.openxmlformats.org/officeDocument/2006/relationships" xmlns:p="http://schemas.openxmlformats.org/presentationml/2006/main">
+  <p:cSld>
+    <p:spTree>
+      <p:nvGrpSpPr>
+        <p:cNvPr id="1" name=""/>
+        <p:cNvGrpSpPr/>
+        <p:nvPr/>
+      </p:nvGrpSpPr>
+      <p:grpSpPr>
+        <a:xfrm>
+          <a:off x="0" y="0"/>
+          <a:ext cx="0" cy="0"/>
+          <a:chOff x="0" y="0"/>
+          <a:chExt cx="0" cy="0"/>
+        </a:xfrm>
+      </p:grpSpPr>
+      <p:sp>
+        <p:nvSpPr>
+          <p:cNvPr id="2" name="Titre 1">
+            <a:extLst>
+              <a:ext uri="{FF2B5EF4-FFF2-40B4-BE49-F238E27FC236}">
+                <a16:creationId xmlns:a16="http://schemas.microsoft.com/office/drawing/2014/main" id="{2370A0E2-49A5-7C2E-92FD-CFE9D4C771E3}"/>
+              </a:ext>
+            </a:extLst>
+          </p:cNvPr>
+          <p:cNvSpPr>
+            <a:spLocks noGrp="1"/>
+          </p:cNvSpPr>
+          <p:nvPr>
+            <p:ph type="title"/>
+          </p:nvPr>
+        </p:nvSpPr>
+        <p:spPr/>
+        <p:txBody>
+          <a:bodyPr/>
+          <a:lstStyle/>
+          <a:p>
+            <a:r>
+              <a:rPr lang="fr-FR" dirty="0" err="1"/>
+              <a:t>Tavily</a:t>
+            </a:r>
+            <a:r>
+              <a:rPr lang="fr-FR" dirty="0"/>
+              <a:t> </a:t>
+            </a:r>
+            <a:r>
+              <a:rPr lang="fr-FR" dirty="0" err="1"/>
+              <a:t>Search</a:t>
+            </a:r>
+            <a:endParaRPr lang="fr-FR" dirty="0"/>
+          </a:p>
+        </p:txBody>
+      </p:sp>
+      <p:sp>
+        <p:nvSpPr>
+          <p:cNvPr id="3" name="Espace réservé du contenu 2">
+            <a:extLst>
+              <a:ext uri="{FF2B5EF4-FFF2-40B4-BE49-F238E27FC236}">
+                <a16:creationId xmlns:a16="http://schemas.microsoft.com/office/drawing/2014/main" id="{6DA88AB3-9A4D-4C8D-AD49-1538D03C004F}"/>
+              </a:ext>
+            </a:extLst>
+          </p:cNvPr>
+          <p:cNvSpPr>
+            <a:spLocks noGrp="1"/>
+          </p:cNvSpPr>
+          <p:nvPr>
+            <p:ph idx="1"/>
+          </p:nvPr>
+        </p:nvSpPr>
+        <p:spPr/>
+        <p:txBody>
+          <a:bodyPr/>
+          <a:lstStyle/>
+          <a:p>
+            <a:r>
+              <a:rPr lang="fr-FR" dirty="0"/>
+              <a:t>Il existe des agents préfabriqués</a:t>
+            </a:r>
+          </a:p>
+          <a:p>
+            <a:r>
+              <a:rPr lang="fr-FR" dirty="0" err="1"/>
+              <a:t>Tavily</a:t>
+            </a:r>
+            <a:r>
+              <a:rPr lang="fr-FR" dirty="0"/>
+              <a:t> </a:t>
+            </a:r>
+            <a:r>
+              <a:rPr lang="fr-FR" dirty="0" err="1"/>
+              <a:t>Search</a:t>
+            </a:r>
+            <a:r>
+              <a:rPr lang="fr-FR" dirty="0"/>
+              <a:t> est un agent de </a:t>
+            </a:r>
+            <a:r>
+              <a:rPr lang="fr-FR"/>
+              <a:t>recherche spécialisé pour les LLM</a:t>
+            </a:r>
+            <a:endParaRPr lang="fr-FR" dirty="0"/>
+          </a:p>
+        </p:txBody>
+      </p:sp>
+    </p:spTree>
+    <p:extLst>
+      <p:ext uri="{BB962C8B-B14F-4D97-AF65-F5344CB8AC3E}">
+        <p14:creationId xmlns:p14="http://schemas.microsoft.com/office/powerpoint/2010/main" val="1423132459"/>
+      </p:ext>
+    </p:extLst>
+  </p:cSld>
+  <p:clrMapOvr>
+    <a:masterClrMapping/>
+  </p:clrMapOvr>
+</p:sld>
+</file>
+
+<file path=ppt/slides/slide2.xml><?xml version="1.0" encoding="utf-8"?>
+<p:sld xmlns:a="http://schemas.openxmlformats.org/drawingml/2006/main" xmlns:r="http://schemas.openxmlformats.org/officeDocument/2006/relationships" xmlns:p="http://schemas.openxmlformats.org/presentationml/2006/main">
+  <p:cSld>
+    <p:spTree>
+      <p:nvGrpSpPr>
+        <p:cNvPr id="1" name=""/>
+        <p:cNvGrpSpPr/>
+        <p:nvPr/>
+      </p:nvGrpSpPr>
+      <p:grpSpPr>
+        <a:xfrm>
+          <a:off x="0" y="0"/>
+          <a:ext cx="0" cy="0"/>
+          <a:chOff x="0" y="0"/>
+          <a:chExt cx="0" cy="0"/>
+        </a:xfrm>
+      </p:grpSpPr>
+      <p:sp>
+        <p:nvSpPr>
+          <p:cNvPr id="2" name="Titre 1">
+            <a:extLst>
+              <a:ext uri="{FF2B5EF4-FFF2-40B4-BE49-F238E27FC236}">
+                <a16:creationId xmlns:a16="http://schemas.microsoft.com/office/drawing/2014/main" id="{621844AD-0631-789D-382B-AE0192A717A6}"/>
+              </a:ext>
+            </a:extLst>
+          </p:cNvPr>
+          <p:cNvSpPr>
+            <a:spLocks noGrp="1"/>
+          </p:cNvSpPr>
+          <p:nvPr>
+            <p:ph type="title"/>
+          </p:nvPr>
+        </p:nvSpPr>
+        <p:spPr/>
+        <p:txBody>
+          <a:bodyPr/>
+          <a:lstStyle/>
+          <a:p>
+            <a:r>
+              <a:rPr lang="fr-FR" dirty="0"/>
+              <a:t>Besoin de mémoire</a:t>
+            </a:r>
+          </a:p>
+        </p:txBody>
+      </p:sp>
+      <p:sp>
+        <p:nvSpPr>
+          <p:cNvPr id="3" name="Espace réservé du contenu 2">
+            <a:extLst>
+              <a:ext uri="{FF2B5EF4-FFF2-40B4-BE49-F238E27FC236}">
+                <a16:creationId xmlns:a16="http://schemas.microsoft.com/office/drawing/2014/main" id="{AB7B2FF8-79C1-0514-D6F8-A72A2FD307A2}"/>
+              </a:ext>
+            </a:extLst>
+          </p:cNvPr>
+          <p:cNvSpPr>
+            <a:spLocks noGrp="1"/>
+          </p:cNvSpPr>
+          <p:nvPr>
+            <p:ph idx="1"/>
+          </p:nvPr>
+        </p:nvSpPr>
+        <p:spPr/>
+        <p:txBody>
+          <a:bodyPr/>
+          <a:lstStyle/>
+          <a:p>
+            <a:endParaRPr lang="fr-FR"/>
+          </a:p>
+        </p:txBody>
+      </p:sp>
+      <p:pic>
+        <p:nvPicPr>
+          <p:cNvPr id="5" name="Image 4">
+            <a:extLst>
+              <a:ext uri="{FF2B5EF4-FFF2-40B4-BE49-F238E27FC236}">
+                <a16:creationId xmlns:a16="http://schemas.microsoft.com/office/drawing/2014/main" id="{2E524A2F-C5B7-116E-FA0C-02FFCEC7B135}"/>
+              </a:ext>
+            </a:extLst>
+          </p:cNvPr>
+          <p:cNvPicPr>
+            <a:picLocks noChangeAspect="1"/>
+          </p:cNvPicPr>
+          <p:nvPr/>
+        </p:nvPicPr>
+        <p:blipFill>
+          <a:blip r:embed="rId2"/>
+          <a:stretch>
+            <a:fillRect/>
+          </a:stretch>
+        </p:blipFill>
+        <p:spPr>
+          <a:xfrm>
+            <a:off x="178768" y="2060848"/>
+            <a:ext cx="8630854" cy="3229426"/>
+          </a:xfrm>
+          <a:prstGeom prst="rect">
+            <a:avLst/>
+          </a:prstGeom>
+        </p:spPr>
+      </p:pic>
+    </p:spTree>
+    <p:extLst>
+      <p:ext uri="{BB962C8B-B14F-4D97-AF65-F5344CB8AC3E}">
+        <p14:creationId xmlns:p14="http://schemas.microsoft.com/office/powerpoint/2010/main" val="44724775"/>
+      </p:ext>
+    </p:extLst>
+  </p:cSld>
+  <p:clrMapOvr>
+    <a:masterClrMapping/>
+  </p:clrMapOvr>
+</p:sld>
+</file>
+
+<file path=ppt/slides/slide3.xml><?xml version="1.0" encoding="utf-8"?>
+<p:sld xmlns:a="http://schemas.openxmlformats.org/drawingml/2006/main" xmlns:r="http://schemas.openxmlformats.org/officeDocument/2006/relationships" xmlns:p="http://schemas.openxmlformats.org/presentationml/2006/main">
+  <p:cSld>
+    <p:spTree>
+      <p:nvGrpSpPr>
+        <p:cNvPr id="1" name=""/>
+        <p:cNvGrpSpPr/>
+        <p:nvPr/>
+      </p:nvGrpSpPr>
+      <p:grpSpPr>
+        <a:xfrm>
+          <a:off x="0" y="0"/>
+          <a:ext cx="0" cy="0"/>
+          <a:chOff x="0" y="0"/>
+          <a:chExt cx="0" cy="0"/>
+        </a:xfrm>
+      </p:grpSpPr>
+      <p:sp>
+        <p:nvSpPr>
+          <p:cNvPr id="2" name="Titre 1">
+            <a:extLst>
+              <a:ext uri="{FF2B5EF4-FFF2-40B4-BE49-F238E27FC236}">
+                <a16:creationId xmlns:a16="http://schemas.microsoft.com/office/drawing/2014/main" id="{851B6D45-439D-ACFB-326E-14DE72EC9813}"/>
+              </a:ext>
+            </a:extLst>
+          </p:cNvPr>
+          <p:cNvSpPr>
+            <a:spLocks noGrp="1"/>
+          </p:cNvSpPr>
+          <p:nvPr>
+            <p:ph type="title"/>
+          </p:nvPr>
+        </p:nvSpPr>
+        <p:spPr/>
+        <p:txBody>
+          <a:bodyPr/>
+          <a:lstStyle/>
+          <a:p>
+            <a:r>
+              <a:rPr lang="fr-FR" dirty="0" err="1"/>
+              <a:t>Persistence</a:t>
+            </a:r>
+            <a:endParaRPr lang="fr-FR" dirty="0"/>
+          </a:p>
+        </p:txBody>
+      </p:sp>
+      <p:sp>
+        <p:nvSpPr>
+          <p:cNvPr id="3" name="Espace réservé du contenu 2">
+            <a:extLst>
+              <a:ext uri="{FF2B5EF4-FFF2-40B4-BE49-F238E27FC236}">
+                <a16:creationId xmlns:a16="http://schemas.microsoft.com/office/drawing/2014/main" id="{E762579D-C7B6-214E-27D5-B243A87C79AB}"/>
+              </a:ext>
+            </a:extLst>
+          </p:cNvPr>
+          <p:cNvSpPr>
+            <a:spLocks noGrp="1"/>
+          </p:cNvSpPr>
+          <p:nvPr>
+            <p:ph idx="1"/>
+          </p:nvPr>
+        </p:nvSpPr>
+        <p:spPr>
+          <a:xfrm>
+            <a:off x="179513" y="1412776"/>
+            <a:ext cx="4824536" cy="5040560"/>
+          </a:xfrm>
+        </p:spPr>
+        <p:txBody>
+          <a:bodyPr/>
+          <a:lstStyle/>
+          <a:p>
+            <a:r>
+              <a:rPr lang="fr-FR" dirty="0"/>
+              <a:t>Il est souvent utile de sauvegarder les conversations d'un RAG dans une BD</a:t>
+            </a:r>
+          </a:p>
+          <a:p>
+            <a:r>
+              <a:rPr lang="fr-FR" dirty="0"/>
+              <a:t>A long terme</a:t>
+            </a:r>
+          </a:p>
+          <a:p>
+            <a:pPr lvl="1"/>
+            <a:r>
+              <a:rPr lang="fr-FR" dirty="0"/>
+              <a:t>Un BD</a:t>
+            </a:r>
+          </a:p>
+          <a:p>
+            <a:r>
+              <a:rPr lang="fr-FR" dirty="0"/>
+              <a:t>A court terme</a:t>
+            </a:r>
+          </a:p>
+          <a:p>
+            <a:pPr lvl="1"/>
+            <a:r>
+              <a:rPr lang="fr-FR" dirty="0"/>
+              <a:t>Pour maintenir un contexte pendant le chat</a:t>
+            </a:r>
+          </a:p>
+        </p:txBody>
+      </p:sp>
+      <p:pic>
+        <p:nvPicPr>
+          <p:cNvPr id="1026" name="Picture 2">
+            <a:extLst>
+              <a:ext uri="{FF2B5EF4-FFF2-40B4-BE49-F238E27FC236}">
+                <a16:creationId xmlns:a16="http://schemas.microsoft.com/office/drawing/2014/main" id="{C17A0699-E38C-5647-9BDA-29A06CCB7ACB}"/>
+              </a:ext>
+            </a:extLst>
+          </p:cNvPr>
+          <p:cNvPicPr>
+            <a:picLocks noChangeAspect="1" noChangeArrowheads="1"/>
+          </p:cNvPicPr>
+          <p:nvPr/>
+        </p:nvPicPr>
+        <p:blipFill>
+          <a:blip r:embed="rId2">
+            <a:extLst>
+              <a:ext uri="{28A0092B-C50C-407E-A947-70E740481C1C}">
+                <a14:useLocalDpi xmlns:a14="http://schemas.microsoft.com/office/drawing/2010/main" val="0"/>
+              </a:ext>
+            </a:extLst>
+          </a:blip>
+          <a:srcRect/>
+          <a:stretch>
+            <a:fillRect/>
+          </a:stretch>
+        </p:blipFill>
+        <p:spPr bwMode="auto">
+          <a:xfrm>
+            <a:off x="4597825" y="2002532"/>
+            <a:ext cx="4510648" cy="2938636"/>
+          </a:xfrm>
+          <a:prstGeom prst="rect">
+            <a:avLst/>
+          </a:prstGeom>
+          <a:noFill/>
+          <a:extLst>
+            <a:ext uri="{909E8E84-426E-40DD-AFC4-6F175D3DCCD1}">
+              <a14:hiddenFill xmlns:a14="http://schemas.microsoft.com/office/drawing/2010/main">
+                <a:solidFill>
+                  <a:srgbClr val="FFFFFF"/>
+                </a:solidFill>
+              </a14:hiddenFill>
+            </a:ext>
+          </a:extLst>
+        </p:spPr>
+      </p:pic>
+    </p:spTree>
+    <p:extLst>
+      <p:ext uri="{BB962C8B-B14F-4D97-AF65-F5344CB8AC3E}">
+        <p14:creationId xmlns:p14="http://schemas.microsoft.com/office/powerpoint/2010/main" val="1701389020"/>
+      </p:ext>
+    </p:extLst>
+  </p:cSld>
+  <p:clrMapOvr>
+    <a:masterClrMapping/>
+  </p:clrMapOvr>
+</p:sld>
+</file>
+
+<file path=ppt/slides/slide4.xml><?xml version="1.0" encoding="utf-8"?>
+<p:sld xmlns:a="http://schemas.openxmlformats.org/drawingml/2006/main" xmlns:r="http://schemas.openxmlformats.org/officeDocument/2006/relationships" xmlns:p="http://schemas.openxmlformats.org/presentationml/2006/main">
+  <p:cSld>
+    <p:spTree>
+      <p:nvGrpSpPr>
+        <p:cNvPr id="1" name=""/>
+        <p:cNvGrpSpPr/>
+        <p:nvPr/>
+      </p:nvGrpSpPr>
+      <p:grpSpPr>
+        <a:xfrm>
+          <a:off x="0" y="0"/>
+          <a:ext cx="0" cy="0"/>
+          <a:chOff x="0" y="0"/>
+          <a:chExt cx="0" cy="0"/>
+        </a:xfrm>
+      </p:grpSpPr>
+      <p:sp>
+        <p:nvSpPr>
+          <p:cNvPr id="2" name="Titre 1">
+            <a:extLst>
+              <a:ext uri="{FF2B5EF4-FFF2-40B4-BE49-F238E27FC236}">
+                <a16:creationId xmlns:a16="http://schemas.microsoft.com/office/drawing/2014/main" id="{6EE4F2B0-FDBF-8452-85AC-25A45A39843F}"/>
+              </a:ext>
+            </a:extLst>
+          </p:cNvPr>
+          <p:cNvSpPr>
+            <a:spLocks noGrp="1"/>
+          </p:cNvSpPr>
+          <p:nvPr>
+            <p:ph type="title"/>
+          </p:nvPr>
+        </p:nvSpPr>
+        <p:spPr/>
+        <p:txBody>
+          <a:bodyPr/>
+          <a:lstStyle/>
+          <a:p>
+            <a:r>
+              <a:rPr lang="fr-FR" dirty="0" err="1"/>
+              <a:t>MemorySaver</a:t>
+            </a:r>
+            <a:endParaRPr lang="fr-FR" dirty="0"/>
+          </a:p>
+        </p:txBody>
+      </p:sp>
+      <p:sp>
+        <p:nvSpPr>
+          <p:cNvPr id="3" name="Espace réservé du contenu 2">
+            <a:extLst>
+              <a:ext uri="{FF2B5EF4-FFF2-40B4-BE49-F238E27FC236}">
+                <a16:creationId xmlns:a16="http://schemas.microsoft.com/office/drawing/2014/main" id="{CAD58AB0-14D5-7321-CFEF-DFA8EEED8B12}"/>
+              </a:ext>
+            </a:extLst>
+          </p:cNvPr>
+          <p:cNvSpPr>
+            <a:spLocks noGrp="1"/>
+          </p:cNvSpPr>
+          <p:nvPr>
+            <p:ph idx="1"/>
+          </p:nvPr>
+        </p:nvSpPr>
+        <p:spPr/>
+        <p:txBody>
+          <a:bodyPr/>
+          <a:lstStyle/>
+          <a:p>
+            <a:r>
+              <a:rPr lang="fr-FR" dirty="0"/>
+              <a:t>Mémoire à court terme</a:t>
+            </a:r>
+          </a:p>
+          <a:p>
+            <a:pPr lvl="1"/>
+            <a:r>
+              <a:rPr lang="en-US" dirty="0"/>
+              <a:t>from </a:t>
+            </a:r>
+            <a:r>
+              <a:rPr lang="en-US" dirty="0" err="1"/>
+              <a:t>langgraph.checkpoint.memory</a:t>
+            </a:r>
+            <a:r>
+              <a:rPr lang="en-US" dirty="0"/>
+              <a:t> import </a:t>
+            </a:r>
+            <a:r>
+              <a:rPr lang="en-US" dirty="0" err="1"/>
+              <a:t>MemorySaver</a:t>
+            </a:r>
+            <a:endParaRPr lang="en-US" dirty="0"/>
+          </a:p>
+          <a:p>
+            <a:pPr lvl="1"/>
+            <a:r>
+              <a:rPr lang="en-US" dirty="0"/>
+              <a:t>memory = </a:t>
+            </a:r>
+            <a:r>
+              <a:rPr lang="en-US" dirty="0" err="1"/>
+              <a:t>MemorySaver</a:t>
+            </a:r>
+            <a:r>
+              <a:rPr lang="en-US" dirty="0"/>
+              <a:t>()</a:t>
+            </a:r>
+          </a:p>
+          <a:p>
+            <a:pPr lvl="1"/>
+            <a:r>
+              <a:rPr lang="en-US" dirty="0"/>
+              <a:t>graph = </a:t>
+            </a:r>
+            <a:r>
+              <a:rPr lang="en-US" dirty="0" err="1"/>
+              <a:t>graph_builder.compile</a:t>
+            </a:r>
+            <a:r>
+              <a:rPr lang="en-US" dirty="0"/>
+              <a:t>(</a:t>
+            </a:r>
+            <a:r>
+              <a:rPr lang="en-US" dirty="0" err="1"/>
+              <a:t>checkpointer</a:t>
+            </a:r>
+            <a:r>
+              <a:rPr lang="en-US" dirty="0"/>
+              <a:t>=memory)</a:t>
+            </a:r>
+          </a:p>
+          <a:p>
+            <a:pPr lvl="1"/>
+            <a:r>
+              <a:rPr lang="en-US" dirty="0" err="1"/>
+              <a:t>Nécessite</a:t>
+            </a:r>
+            <a:r>
+              <a:rPr lang="en-US" dirty="0"/>
+              <a:t> un id unique par discussion</a:t>
+            </a:r>
+          </a:p>
+          <a:p>
+            <a:pPr lvl="1"/>
+            <a:r>
+              <a:rPr lang="en-US" dirty="0"/>
+              <a:t>config = {"configurable": {"</a:t>
+            </a:r>
+            <a:r>
+              <a:rPr lang="en-US" dirty="0" err="1"/>
+              <a:t>thread_id</a:t>
+            </a:r>
+            <a:r>
+              <a:rPr lang="en-US" dirty="0"/>
+              <a:t>": "uniqueId1234"}}</a:t>
+            </a:r>
+          </a:p>
+          <a:p>
+            <a:pPr lvl="1"/>
+            <a:r>
+              <a:rPr lang="en-US" dirty="0"/>
+              <a:t>response = </a:t>
+            </a:r>
+            <a:r>
+              <a:rPr lang="en-US" dirty="0" err="1"/>
+              <a:t>graph.invoke</a:t>
+            </a:r>
+            <a:r>
+              <a:rPr lang="en-US" dirty="0"/>
+              <a:t>({"question": "</a:t>
+            </a:r>
+            <a:r>
+              <a:rPr lang="en-US" dirty="0" err="1"/>
+              <a:t>Qu'est</a:t>
+            </a:r>
+            <a:r>
+              <a:rPr lang="en-US" dirty="0"/>
+              <a:t> </a:t>
+            </a:r>
+            <a:r>
+              <a:rPr lang="en-US" dirty="0" err="1"/>
+              <a:t>ce</a:t>
+            </a:r>
+            <a:r>
+              <a:rPr lang="en-US" dirty="0"/>
+              <a:t> </a:t>
+            </a:r>
+            <a:r>
+              <a:rPr lang="en-US" dirty="0" err="1"/>
+              <a:t>que</a:t>
+            </a:r>
+            <a:r>
+              <a:rPr lang="en-US" dirty="0"/>
+              <a:t> le RAG?"}, config=config)</a:t>
+            </a:r>
+          </a:p>
+          <a:p>
+            <a:pPr lvl="1"/>
+            <a:endParaRPr lang="fr-FR" dirty="0"/>
+          </a:p>
+        </p:txBody>
+      </p:sp>
+    </p:spTree>
+    <p:extLst>
+      <p:ext uri="{BB962C8B-B14F-4D97-AF65-F5344CB8AC3E}">
+        <p14:creationId xmlns:p14="http://schemas.microsoft.com/office/powerpoint/2010/main" val="1216784413"/>
+      </p:ext>
+    </p:extLst>
+  </p:cSld>
+  <p:clrMapOvr>
+    <a:masterClrMapping/>
+  </p:clrMapOvr>
+</p:sld>
+</file>
+
+<file path=ppt/slides/slide5.xml><?xml version="1.0" encoding="utf-8"?>
+<p:sld xmlns:a="http://schemas.openxmlformats.org/drawingml/2006/main" xmlns:r="http://schemas.openxmlformats.org/officeDocument/2006/relationships" xmlns:p="http://schemas.openxmlformats.org/presentationml/2006/main">
+  <p:cSld>
+    <p:spTree>
+      <p:nvGrpSpPr>
+        <p:cNvPr id="1" name=""/>
+        <p:cNvGrpSpPr/>
+        <p:nvPr/>
+      </p:nvGrpSpPr>
+      <p:grpSpPr>
+        <a:xfrm>
+          <a:off x="0" y="0"/>
+          <a:ext cx="0" cy="0"/>
+          <a:chOff x="0" y="0"/>
+          <a:chExt cx="0" cy="0"/>
+        </a:xfrm>
+      </p:grpSpPr>
+      <p:sp>
+        <p:nvSpPr>
+          <p:cNvPr id="2" name="Titre 1">
+            <a:extLst>
+              <a:ext uri="{FF2B5EF4-FFF2-40B4-BE49-F238E27FC236}">
+                <a16:creationId xmlns:a16="http://schemas.microsoft.com/office/drawing/2014/main" id="{819C70DA-55A3-E67C-1539-AB8DE106FA8C}"/>
+              </a:ext>
+            </a:extLst>
+          </p:cNvPr>
+          <p:cNvSpPr>
+            <a:spLocks noGrp="1"/>
+          </p:cNvSpPr>
+          <p:nvPr>
+            <p:ph type="title"/>
+          </p:nvPr>
+        </p:nvSpPr>
+        <p:spPr/>
+        <p:txBody>
+          <a:bodyPr/>
+          <a:lstStyle/>
+          <a:p>
+            <a:r>
+              <a:rPr lang="fr-FR" dirty="0" err="1"/>
+              <a:t>Postgres</a:t>
+            </a:r>
+            <a:endParaRPr lang="fr-FR" dirty="0"/>
+          </a:p>
+        </p:txBody>
+      </p:sp>
+      <p:sp>
+        <p:nvSpPr>
+          <p:cNvPr id="3" name="Espace réservé du contenu 2">
+            <a:extLst>
+              <a:ext uri="{FF2B5EF4-FFF2-40B4-BE49-F238E27FC236}">
+                <a16:creationId xmlns:a16="http://schemas.microsoft.com/office/drawing/2014/main" id="{61229378-B95C-3133-E9B3-A74DA9EEC97B}"/>
+              </a:ext>
+            </a:extLst>
+          </p:cNvPr>
+          <p:cNvSpPr>
+            <a:spLocks noGrp="1"/>
+          </p:cNvSpPr>
+          <p:nvPr>
+            <p:ph idx="1"/>
+          </p:nvPr>
+        </p:nvSpPr>
+        <p:spPr/>
+        <p:txBody>
+          <a:bodyPr/>
+          <a:lstStyle/>
+          <a:p>
+            <a:r>
+              <a:rPr lang="fr-FR" dirty="0"/>
+              <a:t>Enregistrement BD à long terme</a:t>
+            </a:r>
+          </a:p>
+          <a:p>
+            <a:pPr lvl="1"/>
+            <a:r>
+              <a:rPr lang="fr-FR" dirty="0" err="1"/>
+              <a:t>pip</a:t>
+            </a:r>
+            <a:r>
+              <a:rPr lang="fr-FR" dirty="0"/>
+              <a:t> </a:t>
+            </a:r>
+            <a:r>
+              <a:rPr lang="fr-FR" dirty="0" err="1"/>
+              <a:t>install</a:t>
+            </a:r>
+            <a:r>
+              <a:rPr lang="fr-FR" dirty="0"/>
+              <a:t> </a:t>
+            </a:r>
+            <a:r>
+              <a:rPr lang="fr-FR" dirty="0" err="1"/>
+              <a:t>langgraph</a:t>
+            </a:r>
+            <a:r>
+              <a:rPr lang="fr-FR" dirty="0"/>
+              <a:t>-checkpoint-</a:t>
+            </a:r>
+            <a:r>
+              <a:rPr lang="fr-FR" dirty="0" err="1"/>
+              <a:t>postgres</a:t>
+            </a:r>
+            <a:endParaRPr lang="fr-FR" dirty="0"/>
+          </a:p>
+          <a:p>
+            <a:pPr lvl="1"/>
+            <a:r>
+              <a:rPr lang="fr-FR" dirty="0" err="1"/>
+              <a:t>from</a:t>
+            </a:r>
+            <a:r>
+              <a:rPr lang="fr-FR" dirty="0"/>
+              <a:t> </a:t>
+            </a:r>
+            <a:r>
+              <a:rPr lang="fr-FR" dirty="0" err="1"/>
+              <a:t>langgraph.store.postgres</a:t>
+            </a:r>
+            <a:r>
+              <a:rPr lang="fr-FR" dirty="0"/>
+              <a:t> import </a:t>
+            </a:r>
+            <a:r>
+              <a:rPr lang="fr-FR" dirty="0" err="1"/>
+              <a:t>PostgresStore</a:t>
+            </a:r>
+            <a:endParaRPr lang="fr-FR" dirty="0"/>
+          </a:p>
+          <a:p>
+            <a:pPr lvl="1"/>
+            <a:r>
+              <a:rPr lang="fr-FR" dirty="0" err="1"/>
+              <a:t>with</a:t>
+            </a:r>
+            <a:r>
+              <a:rPr lang="fr-FR" dirty="0"/>
+              <a:t> </a:t>
+            </a:r>
+            <a:r>
+              <a:rPr lang="fr-FR" dirty="0" err="1"/>
+              <a:t>PostgresStore.from_conn_string</a:t>
+            </a:r>
+            <a:r>
+              <a:rPr lang="fr-FR" dirty="0"/>
+              <a:t>(DB_URI) as store:</a:t>
+            </a:r>
+          </a:p>
+          <a:p>
+            <a:pPr lvl="1"/>
+            <a:r>
+              <a:rPr lang="fr-FR" dirty="0"/>
+              <a:t>    </a:t>
+            </a:r>
+            <a:r>
+              <a:rPr lang="fr-FR" dirty="0" err="1"/>
+              <a:t>builder</a:t>
+            </a:r>
+            <a:r>
+              <a:rPr lang="fr-FR" dirty="0"/>
+              <a:t> = </a:t>
+            </a:r>
+            <a:r>
+              <a:rPr lang="fr-FR" dirty="0" err="1"/>
+              <a:t>StateGraph</a:t>
+            </a:r>
+            <a:r>
+              <a:rPr lang="fr-FR" dirty="0"/>
+              <a:t>(...)</a:t>
+            </a:r>
+          </a:p>
+          <a:p>
+            <a:pPr lvl="1"/>
+            <a:r>
+              <a:rPr lang="fr-FR" dirty="0"/>
+              <a:t>    graph = </a:t>
+            </a:r>
+            <a:r>
+              <a:rPr lang="fr-FR" dirty="0" err="1"/>
+              <a:t>builder.compile</a:t>
+            </a:r>
+            <a:r>
+              <a:rPr lang="fr-FR" dirty="0"/>
+              <a:t>(store=store)</a:t>
+            </a:r>
+          </a:p>
+          <a:p>
+            <a:endParaRPr lang="fr-FR" dirty="0"/>
+          </a:p>
+        </p:txBody>
+      </p:sp>
+    </p:spTree>
+    <p:extLst>
+      <p:ext uri="{BB962C8B-B14F-4D97-AF65-F5344CB8AC3E}">
+        <p14:creationId xmlns:p14="http://schemas.microsoft.com/office/powerpoint/2010/main" val="3558070663"/>
+      </p:ext>
+    </p:extLst>
+  </p:cSld>
+  <p:clrMapOvr>
+    <a:masterClrMapping/>
+  </p:clrMapOvr>
+</p:sld>
+</file>
+
+<file path=ppt/slides/slide6.xml><?xml version="1.0" encoding="utf-8"?>
+<p:sld xmlns:a="http://schemas.openxmlformats.org/drawingml/2006/main" xmlns:r="http://schemas.openxmlformats.org/officeDocument/2006/relationships" xmlns:p="http://schemas.openxmlformats.org/presentationml/2006/main">
+  <p:cSld>
+    <p:spTree>
+      <p:nvGrpSpPr>
+        <p:cNvPr id="1" name=""/>
+        <p:cNvGrpSpPr/>
+        <p:nvPr/>
+      </p:nvGrpSpPr>
+      <p:grpSpPr>
+        <a:xfrm>
+          <a:off x="0" y="0"/>
+          <a:ext cx="0" cy="0"/>
+          <a:chOff x="0" y="0"/>
+          <a:chExt cx="0" cy="0"/>
+        </a:xfrm>
+      </p:grpSpPr>
+      <p:sp>
+        <p:nvSpPr>
+          <p:cNvPr id="2" name="Titre 1">
+            <a:extLst>
+              <a:ext uri="{FF2B5EF4-FFF2-40B4-BE49-F238E27FC236}">
+                <a16:creationId xmlns:a16="http://schemas.microsoft.com/office/drawing/2014/main" id="{8093EA56-7AFF-2D78-ED74-A79E2C10832F}"/>
+              </a:ext>
+            </a:extLst>
+          </p:cNvPr>
+          <p:cNvSpPr>
+            <a:spLocks noGrp="1"/>
+          </p:cNvSpPr>
+          <p:nvPr>
+            <p:ph type="title"/>
+          </p:nvPr>
+        </p:nvSpPr>
+        <p:spPr/>
+        <p:txBody>
+          <a:bodyPr/>
+          <a:lstStyle/>
+          <a:p>
+            <a:r>
+              <a:rPr lang="fr-FR" dirty="0"/>
+              <a:t>Agent IA</a:t>
+            </a:r>
+          </a:p>
+        </p:txBody>
+      </p:sp>
+      <p:sp>
+        <p:nvSpPr>
+          <p:cNvPr id="3" name="Espace réservé du contenu 2">
+            <a:extLst>
+              <a:ext uri="{FF2B5EF4-FFF2-40B4-BE49-F238E27FC236}">
+                <a16:creationId xmlns:a16="http://schemas.microsoft.com/office/drawing/2014/main" id="{511D3116-3EDB-E50F-2228-F97618BF24A8}"/>
+              </a:ext>
+            </a:extLst>
+          </p:cNvPr>
+          <p:cNvSpPr>
+            <a:spLocks noGrp="1"/>
+          </p:cNvSpPr>
+          <p:nvPr>
+            <p:ph idx="1"/>
+          </p:nvPr>
+        </p:nvSpPr>
+        <p:spPr/>
+        <p:txBody>
+          <a:bodyPr/>
+          <a:lstStyle/>
+          <a:p>
+            <a:r>
+              <a:rPr lang="fr-FR" dirty="0"/>
+              <a:t>En intelligence artificielle, un agent intelligent est une entité autonome, éventuellement dotée d'une persona, éventuellement capable de percevoir son environnement grâce à des capteurs, ainsi que d'agir sur celui-ci, au moyen d'effecteurs, afin de réaliser une tâche</a:t>
+            </a:r>
+          </a:p>
+        </p:txBody>
+      </p:sp>
+    </p:spTree>
+    <p:extLst>
+      <p:ext uri="{BB962C8B-B14F-4D97-AF65-F5344CB8AC3E}">
+        <p14:creationId xmlns:p14="http://schemas.microsoft.com/office/powerpoint/2010/main" val="3531968666"/>
+      </p:ext>
+    </p:extLst>
+  </p:cSld>
+  <p:clrMapOvr>
+    <a:masterClrMapping/>
+  </p:clrMapOvr>
+</p:sld>
+</file>
+
+<file path=ppt/slides/slide7.xml><?xml version="1.0" encoding="utf-8"?>
+<p:sld xmlns:a="http://schemas.openxmlformats.org/drawingml/2006/main" xmlns:r="http://schemas.openxmlformats.org/officeDocument/2006/relationships" xmlns:p="http://schemas.openxmlformats.org/presentationml/2006/main">
+  <p:cSld>
+    <p:spTree>
+      <p:nvGrpSpPr>
+        <p:cNvPr id="1" name=""/>
+        <p:cNvGrpSpPr/>
+        <p:nvPr/>
+      </p:nvGrpSpPr>
+      <p:grpSpPr>
+        <a:xfrm>
+          <a:off x="0" y="0"/>
+          <a:ext cx="0" cy="0"/>
+          <a:chOff x="0" y="0"/>
+          <a:chExt cx="0" cy="0"/>
+        </a:xfrm>
+      </p:grpSpPr>
+      <p:sp>
+        <p:nvSpPr>
+          <p:cNvPr id="2" name="Titre 1">
+            <a:extLst>
+              <a:ext uri="{FF2B5EF4-FFF2-40B4-BE49-F238E27FC236}">
+                <a16:creationId xmlns:a16="http://schemas.microsoft.com/office/drawing/2014/main" id="{91A130BB-9F17-3B45-8948-B193BC001C3D}"/>
+              </a:ext>
+            </a:extLst>
+          </p:cNvPr>
+          <p:cNvSpPr>
+            <a:spLocks noGrp="1"/>
+          </p:cNvSpPr>
+          <p:nvPr>
+            <p:ph type="title"/>
+          </p:nvPr>
+        </p:nvSpPr>
+        <p:spPr/>
+        <p:txBody>
+          <a:bodyPr/>
+          <a:lstStyle/>
+          <a:p>
+            <a:r>
+              <a:rPr lang="fr-FR" dirty="0"/>
+              <a:t>Agent</a:t>
+            </a:r>
+          </a:p>
+        </p:txBody>
+      </p:sp>
+      <p:sp>
+        <p:nvSpPr>
+          <p:cNvPr id="3" name="Espace réservé du contenu 2">
+            <a:extLst>
+              <a:ext uri="{FF2B5EF4-FFF2-40B4-BE49-F238E27FC236}">
+                <a16:creationId xmlns:a16="http://schemas.microsoft.com/office/drawing/2014/main" id="{9D1724F3-AE22-BFB5-97C6-34205098C540}"/>
+              </a:ext>
+            </a:extLst>
+          </p:cNvPr>
+          <p:cNvSpPr>
+            <a:spLocks noGrp="1"/>
+          </p:cNvSpPr>
+          <p:nvPr>
+            <p:ph idx="1"/>
+          </p:nvPr>
+        </p:nvSpPr>
+        <p:spPr/>
+        <p:txBody>
+          <a:bodyPr/>
+          <a:lstStyle/>
+          <a:p>
+            <a:r>
+              <a:rPr lang="fr-FR" dirty="0"/>
+              <a:t>Un agent doit donc être capable</a:t>
+            </a:r>
+          </a:p>
+          <a:p>
+            <a:pPr lvl="1"/>
+            <a:r>
+              <a:rPr lang="fr-FR" dirty="0"/>
+              <a:t>D'interagir avec une API externe</a:t>
+            </a:r>
+          </a:p>
+          <a:p>
+            <a:pPr lvl="1"/>
+            <a:r>
+              <a:rPr lang="fr-FR" dirty="0"/>
+              <a:t>API, SQL, Capteurs, …</a:t>
+            </a:r>
+          </a:p>
+          <a:p>
+            <a:pPr lvl="1"/>
+            <a:r>
+              <a:rPr lang="fr-FR" dirty="0"/>
+              <a:t>D'interagir avec le LLM</a:t>
+            </a:r>
+          </a:p>
+          <a:p>
+            <a:r>
+              <a:rPr lang="fr-FR" dirty="0"/>
+              <a:t>L'agent va enrichir la réponse du LLM</a:t>
+            </a:r>
+          </a:p>
+          <a:p>
+            <a:pPr lvl="1"/>
+            <a:r>
+              <a:rPr lang="fr-FR" dirty="0"/>
+              <a:t>Arrive en fin de RAG</a:t>
+            </a:r>
+          </a:p>
+          <a:p>
+            <a:r>
+              <a:rPr lang="fr-FR" dirty="0"/>
+              <a:t>Peut être autonome</a:t>
+            </a:r>
+          </a:p>
+          <a:p>
+            <a:pPr lvl="1"/>
+            <a:r>
+              <a:rPr lang="fr-FR" dirty="0"/>
+              <a:t>Programme indépendant</a:t>
+            </a:r>
+          </a:p>
+        </p:txBody>
+      </p:sp>
+    </p:spTree>
+    <p:extLst>
+      <p:ext uri="{BB962C8B-B14F-4D97-AF65-F5344CB8AC3E}">
+        <p14:creationId xmlns:p14="http://schemas.microsoft.com/office/powerpoint/2010/main" val="3429707302"/>
+      </p:ext>
+    </p:extLst>
+  </p:cSld>
+  <p:clrMapOvr>
+    <a:masterClrMapping/>
+  </p:clrMapOvr>
+</p:sld>
+</file>
+
+<file path=ppt/slides/slide8.xml><?xml version="1.0" encoding="utf-8"?>
+<p:sld xmlns:a="http://schemas.openxmlformats.org/drawingml/2006/main" xmlns:r="http://schemas.openxmlformats.org/officeDocument/2006/relationships" xmlns:p="http://schemas.openxmlformats.org/presentationml/2006/main">
+  <p:cSld>
+    <p:spTree>
+      <p:nvGrpSpPr>
+        <p:cNvPr id="1" name=""/>
+        <p:cNvGrpSpPr/>
+        <p:nvPr/>
+      </p:nvGrpSpPr>
+      <p:grpSpPr>
+        <a:xfrm>
+          <a:off x="0" y="0"/>
+          <a:ext cx="0" cy="0"/>
+          <a:chOff x="0" y="0"/>
+          <a:chExt cx="0" cy="0"/>
+        </a:xfrm>
+      </p:grpSpPr>
+      <p:sp>
+        <p:nvSpPr>
+          <p:cNvPr id="2" name="Titre 1">
+            <a:extLst>
+              <a:ext uri="{FF2B5EF4-FFF2-40B4-BE49-F238E27FC236}">
+                <a16:creationId xmlns:a16="http://schemas.microsoft.com/office/drawing/2014/main" id="{A381E18B-F2F8-FC0E-821B-0E065BBC51BE}"/>
+              </a:ext>
+            </a:extLst>
+          </p:cNvPr>
+          <p:cNvSpPr>
+            <a:spLocks noGrp="1"/>
+          </p:cNvSpPr>
+          <p:nvPr>
+            <p:ph type="title"/>
+          </p:nvPr>
+        </p:nvSpPr>
+        <p:spPr/>
+        <p:txBody>
+          <a:bodyPr/>
+          <a:lstStyle/>
+          <a:p>
+            <a:r>
+              <a:rPr lang="fr-FR" dirty="0"/>
+              <a:t>Exemple</a:t>
+            </a:r>
+          </a:p>
+        </p:txBody>
+      </p:sp>
+      <p:sp>
+        <p:nvSpPr>
+          <p:cNvPr id="3" name="Espace réservé du contenu 2">
+            <a:extLst>
+              <a:ext uri="{FF2B5EF4-FFF2-40B4-BE49-F238E27FC236}">
+                <a16:creationId xmlns:a16="http://schemas.microsoft.com/office/drawing/2014/main" id="{9B5834EA-A5F6-CE1B-773B-0E640B1F8F18}"/>
+              </a:ext>
+            </a:extLst>
+          </p:cNvPr>
+          <p:cNvSpPr>
+            <a:spLocks noGrp="1"/>
+          </p:cNvSpPr>
+          <p:nvPr>
+            <p:ph idx="1"/>
+          </p:nvPr>
+        </p:nvSpPr>
+        <p:spPr/>
+        <p:txBody>
+          <a:bodyPr/>
+          <a:lstStyle/>
+          <a:p>
+            <a:r>
+              <a:rPr lang="fr-FR" dirty="0"/>
+              <a:t>Supposons une fonction métier</a:t>
+            </a:r>
+          </a:p>
+          <a:p>
+            <a:pPr lvl="1"/>
+            <a:r>
+              <a:rPr lang="fr-FR" dirty="0"/>
+              <a:t>Capteur de température</a:t>
+            </a:r>
+          </a:p>
+          <a:p>
+            <a:pPr lvl="1"/>
+            <a:r>
+              <a:rPr lang="fr-FR" dirty="0"/>
+              <a:t>Calcul complexe</a:t>
+            </a:r>
+          </a:p>
+          <a:p>
+            <a:pPr lvl="1"/>
+            <a:r>
+              <a:rPr lang="fr-FR" dirty="0"/>
+              <a:t>Interrogation SQL</a:t>
+            </a:r>
+          </a:p>
+        </p:txBody>
+      </p:sp>
+      <p:pic>
+        <p:nvPicPr>
+          <p:cNvPr id="8" name="Image 7">
+            <a:extLst>
+              <a:ext uri="{FF2B5EF4-FFF2-40B4-BE49-F238E27FC236}">
+                <a16:creationId xmlns:a16="http://schemas.microsoft.com/office/drawing/2014/main" id="{57EDEC46-43DE-0177-0BA9-E919E8028F65}"/>
+              </a:ext>
+            </a:extLst>
+          </p:cNvPr>
+          <p:cNvPicPr>
+            <a:picLocks noChangeAspect="1"/>
+          </p:cNvPicPr>
+          <p:nvPr/>
+        </p:nvPicPr>
+        <p:blipFill>
+          <a:blip r:embed="rId2"/>
+          <a:stretch>
+            <a:fillRect/>
+          </a:stretch>
+        </p:blipFill>
+        <p:spPr>
+          <a:xfrm>
+            <a:off x="1445860" y="3789040"/>
+            <a:ext cx="4289750" cy="1260839"/>
+          </a:xfrm>
+          <a:prstGeom prst="rect">
+            <a:avLst/>
+          </a:prstGeom>
+        </p:spPr>
+      </p:pic>
+    </p:spTree>
+    <p:extLst>
+      <p:ext uri="{BB962C8B-B14F-4D97-AF65-F5344CB8AC3E}">
+        <p14:creationId xmlns:p14="http://schemas.microsoft.com/office/powerpoint/2010/main" val="249956595"/>
+      </p:ext>
+    </p:extLst>
+  </p:cSld>
+  <p:clrMapOvr>
+    <a:masterClrMapping/>
+  </p:clrMapOvr>
+</p:sld>
+</file>
+
+<file path=ppt/slides/slide9.xml><?xml version="1.0" encoding="utf-8"?>
+<p:sld xmlns:a="http://schemas.openxmlformats.org/drawingml/2006/main" xmlns:r="http://schemas.openxmlformats.org/officeDocument/2006/relationships" xmlns:p="http://schemas.openxmlformats.org/presentationml/2006/main">
+  <p:cSld>
+    <p:spTree>
+      <p:nvGrpSpPr>
+        <p:cNvPr id="1" name=""/>
+        <p:cNvGrpSpPr/>
+        <p:nvPr/>
+      </p:nvGrpSpPr>
+      <p:grpSpPr>
+        <a:xfrm>
+          <a:off x="0" y="0"/>
+          <a:ext cx="0" cy="0"/>
+          <a:chOff x="0" y="0"/>
+          <a:chExt cx="0" cy="0"/>
+        </a:xfrm>
+      </p:grpSpPr>
+      <p:sp>
+        <p:nvSpPr>
+          <p:cNvPr id="2" name="Titre 1">
+            <a:extLst>
+              <a:ext uri="{FF2B5EF4-FFF2-40B4-BE49-F238E27FC236}">
+                <a16:creationId xmlns:a16="http://schemas.microsoft.com/office/drawing/2014/main" id="{C088FA9A-6A73-4320-BBC9-9B6BCC2B4255}"/>
+              </a:ext>
+            </a:extLst>
+          </p:cNvPr>
+          <p:cNvSpPr>
+            <a:spLocks noGrp="1"/>
+          </p:cNvSpPr>
+          <p:nvPr>
+            <p:ph type="title"/>
+          </p:nvPr>
+        </p:nvSpPr>
+        <p:spPr/>
+        <p:txBody>
+          <a:bodyPr/>
+          <a:lstStyle/>
+          <a:p>
+            <a:r>
+              <a:rPr lang="fr-FR" dirty="0"/>
+              <a:t>Tool</a:t>
+            </a:r>
+          </a:p>
+        </p:txBody>
+      </p:sp>
+      <p:sp>
+        <p:nvSpPr>
+          <p:cNvPr id="3" name="Espace réservé du contenu 2">
+            <a:extLst>
+              <a:ext uri="{FF2B5EF4-FFF2-40B4-BE49-F238E27FC236}">
+                <a16:creationId xmlns:a16="http://schemas.microsoft.com/office/drawing/2014/main" id="{58CAC8F5-6B28-F127-48A6-0020A9C8AA62}"/>
+              </a:ext>
+            </a:extLst>
+          </p:cNvPr>
+          <p:cNvSpPr>
+            <a:spLocks noGrp="1"/>
+          </p:cNvSpPr>
+          <p:nvPr>
+            <p:ph idx="1"/>
+          </p:nvPr>
+        </p:nvSpPr>
+        <p:spPr/>
+        <p:txBody>
+          <a:bodyPr/>
+          <a:lstStyle/>
+          <a:p>
+            <a:r>
+              <a:rPr lang="fr-FR" dirty="0"/>
+              <a:t>Un Tool est un outil que l'on peut intégrer à l'appel du LLM</a:t>
+            </a:r>
+          </a:p>
+          <a:p>
+            <a:pPr lvl="1"/>
+            <a:r>
+              <a:rPr lang="fr-FR" dirty="0"/>
+              <a:t>Décoration Python</a:t>
+            </a:r>
+          </a:p>
+          <a:p>
+            <a:pPr lvl="1"/>
+            <a:r>
+              <a:rPr lang="fr-FR" dirty="0" err="1"/>
+              <a:t>PyDoc</a:t>
+            </a:r>
+            <a:r>
+              <a:rPr lang="fr-FR" dirty="0"/>
+              <a:t> obligatoire</a:t>
+            </a:r>
+          </a:p>
+          <a:p>
+            <a:pPr lvl="1"/>
+            <a:r>
+              <a:rPr lang="en-US" dirty="0"/>
+              <a:t>from </a:t>
+            </a:r>
+            <a:r>
+              <a:rPr lang="en-US" dirty="0" err="1"/>
+              <a:t>langchain_core.tools</a:t>
+            </a:r>
+            <a:r>
+              <a:rPr lang="en-US" dirty="0"/>
+              <a:t> import tool</a:t>
+            </a:r>
+          </a:p>
+          <a:p>
+            <a:pPr lvl="1"/>
+            <a:r>
+              <a:rPr lang="en-US" dirty="0" err="1"/>
+              <a:t>llm</a:t>
+            </a:r>
+            <a:r>
+              <a:rPr lang="en-US" dirty="0"/>
+              <a:t> = </a:t>
+            </a:r>
+            <a:r>
+              <a:rPr lang="en-US" dirty="0" err="1"/>
+              <a:t>llm.bind_tools</a:t>
+            </a:r>
+            <a:r>
+              <a:rPr lang="en-US" dirty="0"/>
+              <a:t>(tools)</a:t>
+            </a:r>
+            <a:endParaRPr lang="fr-FR" dirty="0"/>
+          </a:p>
+          <a:p>
+            <a:pPr lvl="1"/>
+            <a:endParaRPr lang="fr-FR" dirty="0"/>
+          </a:p>
+        </p:txBody>
+      </p:sp>
+      <p:pic>
+        <p:nvPicPr>
+          <p:cNvPr id="5" name="Image 4">
+            <a:extLst>
+              <a:ext uri="{FF2B5EF4-FFF2-40B4-BE49-F238E27FC236}">
+                <a16:creationId xmlns:a16="http://schemas.microsoft.com/office/drawing/2014/main" id="{F7A95A2D-4B1C-2B3B-183D-3D14D52081FA}"/>
+              </a:ext>
+            </a:extLst>
+          </p:cNvPr>
+          <p:cNvPicPr>
+            <a:picLocks noChangeAspect="1"/>
+          </p:cNvPicPr>
+          <p:nvPr/>
+        </p:nvPicPr>
+        <p:blipFill>
+          <a:blip r:embed="rId2"/>
+          <a:stretch>
+            <a:fillRect/>
+          </a:stretch>
+        </p:blipFill>
+        <p:spPr>
+          <a:xfrm>
+            <a:off x="4572000" y="3642787"/>
+            <a:ext cx="3689619" cy="2810549"/>
+          </a:xfrm>
+          <a:prstGeom prst="rect">
+            <a:avLst/>
+          </a:prstGeom>
+        </p:spPr>
+      </p:pic>
+    </p:spTree>
+    <p:extLst>
+      <p:ext uri="{BB962C8B-B14F-4D97-AF65-F5344CB8AC3E}">
+        <p14:creationId xmlns:p14="http://schemas.microsoft.com/office/powerpoint/2010/main" val="3091717993"/>
       </p:ext>
     </p:extLst>
   </p:cSld>
